--- a/docs/presentation/UrduStack_Presentation.pptx
+++ b/docs/presentation/UrduStack_Presentation.pptx
@@ -3151,13 +3151,57 @@
       </p:sp>
       <p:sp>
         <p:nvSpPr>
-          <p:cNvPr id="3" name="TextBox 2"/>
-          <p:cNvSpPr txBox="1"/>
-          <p:nvPr/>
-        </p:nvSpPr>
-        <p:spPr>
-          <a:xfrm>
-            <a:off x="822960" y="2103120"/>
+          <p:cNvPr id="3" name="Rectangle 2"/>
+          <p:cNvSpPr/>
+          <p:nvPr/>
+        </p:nvSpPr>
+        <p:spPr>
+          <a:xfrm>
+            <a:off x="822960" y="2212848"/>
+            <a:ext cx="310896" cy="146304"/>
+          </a:xfrm>
+          <a:prstGeom prst="rect">
+            <a:avLst/>
+          </a:prstGeom>
+          <a:solidFill>
+            <a:srgbClr val="5EEAD4"/>
+          </a:solidFill>
+          <a:ln>
+            <a:noFill/>
+          </a:ln>
+          <a:effectLst/>
+        </p:spPr>
+        <p:style>
+          <a:lnRef idx="1">
+            <a:schemeClr val="accent1"/>
+          </a:lnRef>
+          <a:fillRef idx="3">
+            <a:schemeClr val="accent1"/>
+          </a:fillRef>
+          <a:effectRef idx="2">
+            <a:schemeClr val="accent1"/>
+          </a:effectRef>
+          <a:fontRef idx="minor">
+            <a:schemeClr val="lt1"/>
+          </a:fontRef>
+        </p:style>
+        <p:txBody>
+          <a:bodyPr rtlCol="0" anchor="ctr"/>
+          <a:lstStyle/>
+          <a:p>
+            <a:pPr algn="ctr"/>
+          </a:p>
+        </p:txBody>
+      </p:sp>
+      <p:sp>
+        <p:nvSpPr>
+          <p:cNvPr id="4" name="TextBox 3"/>
+          <p:cNvSpPr txBox="1"/>
+          <p:nvPr/>
+        </p:nvSpPr>
+        <p:spPr>
+          <a:xfrm>
+            <a:off x="1280160" y="2103120"/>
             <a:ext cx="10515600" cy="548640"/>
           </a:xfrm>
           <a:prstGeom prst="rect">
@@ -3177,20 +3221,20 @@
               </a:lnSpc>
             </a:pPr>
             <a:r>
-              <a:rPr sz="2000" b="1" i="0">
+              <a:rPr sz="1800" b="1" i="0">
                 <a:solidFill>
                   <a:srgbClr val="5EEAD4"/>
                 </a:solidFill>
                 <a:latin typeface="Segoe UI"/>
               </a:rPr>
-              <a:t>🇵🇰  URDUSTACK</a:t>
-            </a:r>
-          </a:p>
-        </p:txBody>
-      </p:sp>
-      <p:sp>
-        <p:nvSpPr>
-          <p:cNvPr id="4" name="TextBox 3"/>
+              <a:t>PAKISTAN  ·  URDU NLP</a:t>
+            </a:r>
+          </a:p>
+        </p:txBody>
+      </p:sp>
+      <p:sp>
+        <p:nvSpPr>
+          <p:cNvPr id="5" name="TextBox 4"/>
           <p:cNvSpPr txBox="1"/>
           <p:nvPr/>
         </p:nvSpPr>
@@ -3229,7 +3273,7 @@
       </p:sp>
       <p:sp>
         <p:nvSpPr>
-          <p:cNvPr id="5" name="TextBox 4"/>
+          <p:cNvPr id="6" name="TextBox 5"/>
           <p:cNvSpPr txBox="1"/>
           <p:nvPr/>
         </p:nvSpPr>
@@ -3268,7 +3312,7 @@
       </p:sp>
       <p:sp>
         <p:nvSpPr>
-          <p:cNvPr id="6" name="TextBox 5"/>
+          <p:cNvPr id="7" name="TextBox 6"/>
           <p:cNvSpPr txBox="1"/>
           <p:nvPr/>
         </p:nvSpPr>
@@ -3307,7 +3351,7 @@
       </p:sp>
       <p:sp>
         <p:nvSpPr>
-          <p:cNvPr id="7" name="Rounded Rectangle 6"/>
+          <p:cNvPr id="8" name="Rounded Rectangle 7"/>
           <p:cNvSpPr/>
           <p:nvPr/>
         </p:nvSpPr>
@@ -3353,7 +3397,7 @@
       </p:sp>
       <p:sp>
         <p:nvSpPr>
-          <p:cNvPr id="8" name="TextBox 7"/>
+          <p:cNvPr id="9" name="TextBox 8"/>
           <p:cNvSpPr txBox="1"/>
           <p:nvPr/>
         </p:nvSpPr>
@@ -3392,7 +3436,7 @@
       </p:sp>
       <p:sp>
         <p:nvSpPr>
-          <p:cNvPr id="9" name="TextBox 8"/>
+          <p:cNvPr id="10" name="TextBox 9"/>
           <p:cNvSpPr txBox="1"/>
           <p:nvPr/>
         </p:nvSpPr>
@@ -3431,7 +3475,7 @@
       </p:sp>
       <p:sp>
         <p:nvSpPr>
-          <p:cNvPr id="10" name="Rounded Rectangle 9"/>
+          <p:cNvPr id="11" name="Rounded Rectangle 10"/>
           <p:cNvSpPr/>
           <p:nvPr/>
         </p:nvSpPr>
@@ -3477,7 +3521,7 @@
       </p:sp>
       <p:sp>
         <p:nvSpPr>
-          <p:cNvPr id="11" name="TextBox 10"/>
+          <p:cNvPr id="12" name="TextBox 11"/>
           <p:cNvSpPr txBox="1"/>
           <p:nvPr/>
         </p:nvSpPr>
@@ -3516,7 +3560,7 @@
       </p:sp>
       <p:sp>
         <p:nvSpPr>
-          <p:cNvPr id="12" name="TextBox 11"/>
+          <p:cNvPr id="13" name="TextBox 12"/>
           <p:cNvSpPr txBox="1"/>
           <p:nvPr/>
         </p:nvSpPr>
@@ -3549,84 +3593,6 @@
                 <a:latin typeface="Segoe UI"/>
               </a:rPr>
               <a:t>Team</a:t>
-            </a:r>
-          </a:p>
-        </p:txBody>
-      </p:sp>
-      <p:sp>
-        <p:nvSpPr>
-          <p:cNvPr id="13" name="TextBox 12"/>
-          <p:cNvSpPr txBox="1"/>
-          <p:nvPr/>
-        </p:nvSpPr>
-        <p:spPr>
-          <a:xfrm>
-            <a:off x="548640" y="6528816"/>
-            <a:ext cx="5486400" cy="274320"/>
-          </a:xfrm>
-          <a:prstGeom prst="rect">
-            <a:avLst/>
-          </a:prstGeom>
-          <a:noFill/>
-        </p:spPr>
-        <p:txBody>
-          <a:bodyPr wrap="square" anchor="t" lIns="0" rIns="0" tIns="0" bIns="0">
-            <a:spAutoFit/>
-          </a:bodyPr>
-          <a:lstStyle/>
-          <a:p>
-            <a:pPr algn="l">
-              <a:lnSpc>
-                <a:spcPct val="108000"/>
-              </a:lnSpc>
-            </a:pPr>
-            <a:r>
-              <a:rPr sz="1100" b="0" i="0">
-                <a:solidFill>
-                  <a:srgbClr val="6B7280"/>
-                </a:solidFill>
-                <a:latin typeface="Segoe UI"/>
-              </a:rPr>
-              <a:t>UrduStack</a:t>
-            </a:r>
-          </a:p>
-        </p:txBody>
-      </p:sp>
-      <p:sp>
-        <p:nvSpPr>
-          <p:cNvPr id="14" name="TextBox 13"/>
-          <p:cNvSpPr txBox="1"/>
-          <p:nvPr/>
-        </p:nvSpPr>
-        <p:spPr>
-          <a:xfrm>
-            <a:off x="10881360" y="6528816"/>
-            <a:ext cx="822960" cy="274320"/>
-          </a:xfrm>
-          <a:prstGeom prst="rect">
-            <a:avLst/>
-          </a:prstGeom>
-          <a:noFill/>
-        </p:spPr>
-        <p:txBody>
-          <a:bodyPr wrap="square" anchor="t" lIns="0" rIns="0" tIns="0" bIns="0">
-            <a:spAutoFit/>
-          </a:bodyPr>
-          <a:lstStyle/>
-          <a:p>
-            <a:pPr algn="r">
-              <a:lnSpc>
-                <a:spcPct val="108000"/>
-              </a:lnSpc>
-            </a:pPr>
-            <a:r>
-              <a:rPr sz="1100" b="0" i="0">
-                <a:solidFill>
-                  <a:srgbClr val="6B7280"/>
-                </a:solidFill>
-                <a:latin typeface="Segoe UI"/>
-              </a:rPr>
-              <a:t>1</a:t>
             </a:r>
           </a:p>
         </p:txBody>
@@ -4145,84 +4111,6 @@
           </a:p>
         </p:txBody>
       </p:sp>
-      <p:sp>
-        <p:nvSpPr>
-          <p:cNvPr id="11" name="TextBox 10"/>
-          <p:cNvSpPr txBox="1"/>
-          <p:nvPr/>
-        </p:nvSpPr>
-        <p:spPr>
-          <a:xfrm>
-            <a:off x="640080" y="6528816"/>
-            <a:ext cx="5486400" cy="274320"/>
-          </a:xfrm>
-          <a:prstGeom prst="rect">
-            <a:avLst/>
-          </a:prstGeom>
-          <a:noFill/>
-        </p:spPr>
-        <p:txBody>
-          <a:bodyPr wrap="square" anchor="t" lIns="0" rIns="0" tIns="0" bIns="0">
-            <a:spAutoFit/>
-          </a:bodyPr>
-          <a:lstStyle/>
-          <a:p>
-            <a:pPr algn="l">
-              <a:lnSpc>
-                <a:spcPct val="108000"/>
-              </a:lnSpc>
-            </a:pPr>
-            <a:r>
-              <a:rPr sz="1100" b="0" i="0">
-                <a:solidFill>
-                  <a:srgbClr val="6B7280"/>
-                </a:solidFill>
-                <a:latin typeface="Segoe UI"/>
-              </a:rPr>
-              <a:t>UrduStack</a:t>
-            </a:r>
-          </a:p>
-        </p:txBody>
-      </p:sp>
-      <p:sp>
-        <p:nvSpPr>
-          <p:cNvPr id="12" name="TextBox 11"/>
-          <p:cNvSpPr txBox="1"/>
-          <p:nvPr/>
-        </p:nvSpPr>
-        <p:spPr>
-          <a:xfrm>
-            <a:off x="10881360" y="6528816"/>
-            <a:ext cx="822960" cy="274320"/>
-          </a:xfrm>
-          <a:prstGeom prst="rect">
-            <a:avLst/>
-          </a:prstGeom>
-          <a:noFill/>
-        </p:spPr>
-        <p:txBody>
-          <a:bodyPr wrap="square" anchor="t" lIns="0" rIns="0" tIns="0" bIns="0">
-            <a:spAutoFit/>
-          </a:bodyPr>
-          <a:lstStyle/>
-          <a:p>
-            <a:pPr algn="r">
-              <a:lnSpc>
-                <a:spcPct val="108000"/>
-              </a:lnSpc>
-            </a:pPr>
-            <a:r>
-              <a:rPr sz="1100" b="0" i="0">
-                <a:solidFill>
-                  <a:srgbClr val="6B7280"/>
-                </a:solidFill>
-                <a:latin typeface="Segoe UI"/>
-              </a:rPr>
-              <a:t>10</a:t>
-            </a:r>
-          </a:p>
-        </p:txBody>
-      </p:sp>
     </p:spTree>
   </p:cSld>
   <p:clrMapOvr>
@@ -4793,84 +4681,6 @@
           </a:p>
         </p:txBody>
       </p:sp>
-      <p:sp>
-        <p:nvSpPr>
-          <p:cNvPr id="13" name="TextBox 12"/>
-          <p:cNvSpPr txBox="1"/>
-          <p:nvPr/>
-        </p:nvSpPr>
-        <p:spPr>
-          <a:xfrm>
-            <a:off x="548640" y="6528816"/>
-            <a:ext cx="5486400" cy="274320"/>
-          </a:xfrm>
-          <a:prstGeom prst="rect">
-            <a:avLst/>
-          </a:prstGeom>
-          <a:noFill/>
-        </p:spPr>
-        <p:txBody>
-          <a:bodyPr wrap="square" anchor="t" lIns="0" rIns="0" tIns="0" bIns="0">
-            <a:spAutoFit/>
-          </a:bodyPr>
-          <a:lstStyle/>
-          <a:p>
-            <a:pPr algn="l">
-              <a:lnSpc>
-                <a:spcPct val="108000"/>
-              </a:lnSpc>
-            </a:pPr>
-            <a:r>
-              <a:rPr sz="1100" b="0" i="0">
-                <a:solidFill>
-                  <a:srgbClr val="6B7280"/>
-                </a:solidFill>
-                <a:latin typeface="Segoe UI"/>
-              </a:rPr>
-              <a:t>UrduStack</a:t>
-            </a:r>
-          </a:p>
-        </p:txBody>
-      </p:sp>
-      <p:sp>
-        <p:nvSpPr>
-          <p:cNvPr id="14" name="TextBox 13"/>
-          <p:cNvSpPr txBox="1"/>
-          <p:nvPr/>
-        </p:nvSpPr>
-        <p:spPr>
-          <a:xfrm>
-            <a:off x="10881360" y="6528816"/>
-            <a:ext cx="822960" cy="274320"/>
-          </a:xfrm>
-          <a:prstGeom prst="rect">
-            <a:avLst/>
-          </a:prstGeom>
-          <a:noFill/>
-        </p:spPr>
-        <p:txBody>
-          <a:bodyPr wrap="square" anchor="t" lIns="0" rIns="0" tIns="0" bIns="0">
-            <a:spAutoFit/>
-          </a:bodyPr>
-          <a:lstStyle/>
-          <a:p>
-            <a:pPr algn="r">
-              <a:lnSpc>
-                <a:spcPct val="108000"/>
-              </a:lnSpc>
-            </a:pPr>
-            <a:r>
-              <a:rPr sz="1100" b="0" i="0">
-                <a:solidFill>
-                  <a:srgbClr val="6B7280"/>
-                </a:solidFill>
-                <a:latin typeface="Segoe UI"/>
-              </a:rPr>
-              <a:t>2</a:t>
-            </a:r>
-          </a:p>
-        </p:txBody>
-      </p:sp>
     </p:spTree>
   </p:cSld>
   <p:clrMapOvr>
@@ -6053,84 +5863,6 @@
           </a:p>
         </p:txBody>
       </p:sp>
-      <p:sp>
-        <p:nvSpPr>
-          <p:cNvPr id="27" name="TextBox 26"/>
-          <p:cNvSpPr txBox="1"/>
-          <p:nvPr/>
-        </p:nvSpPr>
-        <p:spPr>
-          <a:xfrm>
-            <a:off x="548640" y="6528816"/>
-            <a:ext cx="5486400" cy="274320"/>
-          </a:xfrm>
-          <a:prstGeom prst="rect">
-            <a:avLst/>
-          </a:prstGeom>
-          <a:noFill/>
-        </p:spPr>
-        <p:txBody>
-          <a:bodyPr wrap="square" anchor="t" lIns="0" rIns="0" tIns="0" bIns="0">
-            <a:spAutoFit/>
-          </a:bodyPr>
-          <a:lstStyle/>
-          <a:p>
-            <a:pPr algn="l">
-              <a:lnSpc>
-                <a:spcPct val="108000"/>
-              </a:lnSpc>
-            </a:pPr>
-            <a:r>
-              <a:rPr sz="1100" b="0" i="0">
-                <a:solidFill>
-                  <a:srgbClr val="6B7280"/>
-                </a:solidFill>
-                <a:latin typeface="Segoe UI"/>
-              </a:rPr>
-              <a:t>UrduStack</a:t>
-            </a:r>
-          </a:p>
-        </p:txBody>
-      </p:sp>
-      <p:sp>
-        <p:nvSpPr>
-          <p:cNvPr id="28" name="TextBox 27"/>
-          <p:cNvSpPr txBox="1"/>
-          <p:nvPr/>
-        </p:nvSpPr>
-        <p:spPr>
-          <a:xfrm>
-            <a:off x="10881360" y="6528816"/>
-            <a:ext cx="822960" cy="274320"/>
-          </a:xfrm>
-          <a:prstGeom prst="rect">
-            <a:avLst/>
-          </a:prstGeom>
-          <a:noFill/>
-        </p:spPr>
-        <p:txBody>
-          <a:bodyPr wrap="square" anchor="t" lIns="0" rIns="0" tIns="0" bIns="0">
-            <a:spAutoFit/>
-          </a:bodyPr>
-          <a:lstStyle/>
-          <a:p>
-            <a:pPr algn="r">
-              <a:lnSpc>
-                <a:spcPct val="108000"/>
-              </a:lnSpc>
-            </a:pPr>
-            <a:r>
-              <a:rPr sz="1100" b="0" i="0">
-                <a:solidFill>
-                  <a:srgbClr val="6B7280"/>
-                </a:solidFill>
-                <a:latin typeface="Segoe UI"/>
-              </a:rPr>
-              <a:t>3</a:t>
-            </a:r>
-          </a:p>
-        </p:txBody>
-      </p:sp>
     </p:spTree>
   </p:cSld>
   <p:clrMapOvr>
@@ -7269,84 +7001,6 @@
           </a:p>
         </p:txBody>
       </p:sp>
-      <p:sp>
-        <p:nvSpPr>
-          <p:cNvPr id="29" name="TextBox 28"/>
-          <p:cNvSpPr txBox="1"/>
-          <p:nvPr/>
-        </p:nvSpPr>
-        <p:spPr>
-          <a:xfrm>
-            <a:off x="548640" y="6528816"/>
-            <a:ext cx="5486400" cy="274320"/>
-          </a:xfrm>
-          <a:prstGeom prst="rect">
-            <a:avLst/>
-          </a:prstGeom>
-          <a:noFill/>
-        </p:spPr>
-        <p:txBody>
-          <a:bodyPr wrap="square" anchor="t" lIns="0" rIns="0" tIns="0" bIns="0">
-            <a:spAutoFit/>
-          </a:bodyPr>
-          <a:lstStyle/>
-          <a:p>
-            <a:pPr algn="l">
-              <a:lnSpc>
-                <a:spcPct val="108000"/>
-              </a:lnSpc>
-            </a:pPr>
-            <a:r>
-              <a:rPr sz="1100" b="0" i="0">
-                <a:solidFill>
-                  <a:srgbClr val="6B7280"/>
-                </a:solidFill>
-                <a:latin typeface="Segoe UI"/>
-              </a:rPr>
-              <a:t>UrduStack</a:t>
-            </a:r>
-          </a:p>
-        </p:txBody>
-      </p:sp>
-      <p:sp>
-        <p:nvSpPr>
-          <p:cNvPr id="30" name="TextBox 29"/>
-          <p:cNvSpPr txBox="1"/>
-          <p:nvPr/>
-        </p:nvSpPr>
-        <p:spPr>
-          <a:xfrm>
-            <a:off x="10881360" y="6528816"/>
-            <a:ext cx="822960" cy="274320"/>
-          </a:xfrm>
-          <a:prstGeom prst="rect">
-            <a:avLst/>
-          </a:prstGeom>
-          <a:noFill/>
-        </p:spPr>
-        <p:txBody>
-          <a:bodyPr wrap="square" anchor="t" lIns="0" rIns="0" tIns="0" bIns="0">
-            <a:spAutoFit/>
-          </a:bodyPr>
-          <a:lstStyle/>
-          <a:p>
-            <a:pPr algn="r">
-              <a:lnSpc>
-                <a:spcPct val="108000"/>
-              </a:lnSpc>
-            </a:pPr>
-            <a:r>
-              <a:rPr sz="1100" b="0" i="0">
-                <a:solidFill>
-                  <a:srgbClr val="6B7280"/>
-                </a:solidFill>
-                <a:latin typeface="Segoe UI"/>
-              </a:rPr>
-              <a:t>4</a:t>
-            </a:r>
-          </a:p>
-        </p:txBody>
-      </p:sp>
     </p:spTree>
   </p:cSld>
   <p:clrMapOvr>
@@ -7503,8 +7157,8 @@
         </p:nvSpPr>
         <p:spPr>
           <a:xfrm>
-            <a:off x="548640" y="1783080"/>
-            <a:ext cx="2331720" cy="841248"/>
+            <a:off x="548640" y="1691640"/>
+            <a:ext cx="2331720" cy="786384"/>
           </a:xfrm>
           <a:prstGeom prst="roundRect">
             <a:avLst>
@@ -7551,8 +7205,8 @@
         </p:nvSpPr>
         <p:spPr>
           <a:xfrm>
-            <a:off x="713232" y="1874520"/>
-            <a:ext cx="2011680" cy="320040"/>
+            <a:off x="713232" y="1764792"/>
+            <a:ext cx="2011680" cy="292608"/>
           </a:xfrm>
           <a:prstGeom prst="rect">
             <a:avLst/>
@@ -7590,7 +7244,7 @@
         </p:nvSpPr>
         <p:spPr>
           <a:xfrm>
-            <a:off x="713232" y="2112264"/>
+            <a:off x="713232" y="1984248"/>
             <a:ext cx="2011680" cy="457200"/>
           </a:xfrm>
           <a:prstGeom prst="rect">
@@ -7629,8 +7283,8 @@
         </p:nvSpPr>
         <p:spPr>
           <a:xfrm>
-            <a:off x="3063240" y="1783080"/>
-            <a:ext cx="8577072" cy="841248"/>
+            <a:off x="3063240" y="1691640"/>
+            <a:ext cx="8577072" cy="786384"/>
           </a:xfrm>
           <a:prstGeom prst="roundRect">
             <a:avLst>
@@ -7671,269 +7325,53 @@
       </p:sp>
       <p:sp>
         <p:nvSpPr>
-          <p:cNvPr id="9" name="Rounded Rectangle 8"/>
+          <p:cNvPr id="9" name="TextBox 8"/>
+          <p:cNvSpPr txBox="1"/>
+          <p:nvPr/>
+        </p:nvSpPr>
+        <p:spPr>
+          <a:xfrm>
+            <a:off x="3337560" y="1691640"/>
+            <a:ext cx="8028432" cy="786384"/>
+          </a:xfrm>
+          <a:prstGeom prst="rect">
+            <a:avLst/>
+          </a:prstGeom>
+          <a:noFill/>
+        </p:spPr>
+        <p:txBody>
+          <a:bodyPr wrap="square" anchor="ctr" lIns="0" rIns="0" tIns="0" bIns="0">
+            <a:spAutoFit/>
+          </a:bodyPr>
+          <a:lstStyle/>
+          <a:p>
+            <a:pPr algn="l">
+              <a:lnSpc>
+                <a:spcPct val="115000"/>
+              </a:lnSpc>
+            </a:pPr>
+            <a:r>
+              <a:rPr sz="1400" b="0" i="0">
+                <a:solidFill>
+                  <a:srgbClr val="1E3A8A"/>
+                </a:solidFill>
+                <a:latin typeface="Segoe UI"/>
+              </a:rPr>
+              <a:t>Website  ·  Gradio Playground  ·  WhatsApp Bot</a:t>
+            </a:r>
+          </a:p>
+        </p:txBody>
+      </p:sp>
+      <p:sp>
+        <p:nvSpPr>
+          <p:cNvPr id="10" name="Down Arrow 9"/>
           <p:cNvSpPr/>
           <p:nvPr/>
         </p:nvSpPr>
         <p:spPr>
           <a:xfrm>
-            <a:off x="3" y="2002536"/>
-            <a:ext cx="946403" cy="420624"/>
-          </a:xfrm>
-          <a:prstGeom prst="roundRect">
-            <a:avLst>
-              <a:gd name="adj" fmla="val 6000"/>
-            </a:avLst>
-          </a:prstGeom>
-          <a:solidFill>
-            <a:srgbClr val="EFF6FF"/>
-          </a:solidFill>
-          <a:ln>
-            <a:noFill/>
-          </a:ln>
-          <a:effectLst/>
-        </p:spPr>
-        <p:style>
-          <a:lnRef idx="1">
-            <a:schemeClr val="accent1"/>
-          </a:lnRef>
-          <a:fillRef idx="3">
-            <a:schemeClr val="accent1"/>
-          </a:fillRef>
-          <a:effectRef idx="2">
-            <a:schemeClr val="accent1"/>
-          </a:effectRef>
-          <a:fontRef idx="minor">
-            <a:schemeClr val="lt1"/>
-          </a:fontRef>
-        </p:style>
-        <p:txBody>
-          <a:bodyPr rtlCol="0" anchor="ctr"/>
-          <a:lstStyle/>
-          <a:p>
-            <a:pPr algn="ctr"/>
-          </a:p>
-        </p:txBody>
-      </p:sp>
-      <p:sp>
-        <p:nvSpPr>
-          <p:cNvPr id="10" name="TextBox 9"/>
-          <p:cNvSpPr txBox="1"/>
-          <p:nvPr/>
-        </p:nvSpPr>
-        <p:spPr>
-          <a:xfrm>
-            <a:off x="3" y="2002536"/>
-            <a:ext cx="946403" cy="420624"/>
-          </a:xfrm>
-          <a:prstGeom prst="rect">
-            <a:avLst/>
-          </a:prstGeom>
-          <a:noFill/>
-        </p:spPr>
-        <p:txBody>
-          <a:bodyPr wrap="square" anchor="ctr" lIns="0" rIns="0" tIns="0" bIns="0">
-            <a:spAutoFit/>
-          </a:bodyPr>
-          <a:lstStyle/>
-          <a:p>
-            <a:pPr algn="ctr">
-              <a:lnSpc>
-                <a:spcPct val="108000"/>
-              </a:lnSpc>
-            </a:pPr>
-            <a:r>
-              <a:rPr sz="1250" b="0" i="0">
-                <a:solidFill>
-                  <a:srgbClr val="1E3A8A"/>
-                </a:solidFill>
-                <a:latin typeface="Segoe UI"/>
-              </a:rPr>
-              <a:t>Website</a:t>
-            </a:r>
-          </a:p>
-        </p:txBody>
-      </p:sp>
-      <p:sp>
-        <p:nvSpPr>
-          <p:cNvPr id="11" name="Rounded Rectangle 10"/>
-          <p:cNvSpPr/>
-          <p:nvPr/>
-        </p:nvSpPr>
-        <p:spPr>
-          <a:xfrm>
-            <a:off x="1074422" y="2002536"/>
-            <a:ext cx="1906524" cy="420624"/>
-          </a:xfrm>
-          <a:prstGeom prst="roundRect">
-            <a:avLst>
-              <a:gd name="adj" fmla="val 6000"/>
-            </a:avLst>
-          </a:prstGeom>
-          <a:solidFill>
-            <a:srgbClr val="EFF6FF"/>
-          </a:solidFill>
-          <a:ln>
-            <a:noFill/>
-          </a:ln>
-          <a:effectLst/>
-        </p:spPr>
-        <p:style>
-          <a:lnRef idx="1">
-            <a:schemeClr val="accent1"/>
-          </a:lnRef>
-          <a:fillRef idx="3">
-            <a:schemeClr val="accent1"/>
-          </a:fillRef>
-          <a:effectRef idx="2">
-            <a:schemeClr val="accent1"/>
-          </a:effectRef>
-          <a:fontRef idx="minor">
-            <a:schemeClr val="lt1"/>
-          </a:fontRef>
-        </p:style>
-        <p:txBody>
-          <a:bodyPr rtlCol="0" anchor="ctr"/>
-          <a:lstStyle/>
-          <a:p>
-            <a:pPr algn="ctr"/>
-          </a:p>
-        </p:txBody>
-      </p:sp>
-      <p:sp>
-        <p:nvSpPr>
-          <p:cNvPr id="12" name="TextBox 11"/>
-          <p:cNvSpPr txBox="1"/>
-          <p:nvPr/>
-        </p:nvSpPr>
-        <p:spPr>
-          <a:xfrm>
-            <a:off x="1074422" y="2002536"/>
-            <a:ext cx="1906524" cy="420624"/>
-          </a:xfrm>
-          <a:prstGeom prst="rect">
-            <a:avLst/>
-          </a:prstGeom>
-          <a:noFill/>
-        </p:spPr>
-        <p:txBody>
-          <a:bodyPr wrap="square" anchor="ctr" lIns="0" rIns="0" tIns="0" bIns="0">
-            <a:spAutoFit/>
-          </a:bodyPr>
-          <a:lstStyle/>
-          <a:p>
-            <a:pPr algn="ctr">
-              <a:lnSpc>
-                <a:spcPct val="108000"/>
-              </a:lnSpc>
-            </a:pPr>
-            <a:r>
-              <a:rPr sz="1250" b="0" i="0">
-                <a:solidFill>
-                  <a:srgbClr val="1E3A8A"/>
-                </a:solidFill>
-                <a:latin typeface="Segoe UI"/>
-              </a:rPr>
-              <a:t>Gradio Playground</a:t>
-            </a:r>
-          </a:p>
-        </p:txBody>
-      </p:sp>
-      <p:sp>
-        <p:nvSpPr>
-          <p:cNvPr id="13" name="Rounded Rectangle 12"/>
-          <p:cNvSpPr/>
-          <p:nvPr/>
-        </p:nvSpPr>
-        <p:spPr>
-          <a:xfrm>
-            <a:off x="3108962" y="2002536"/>
-            <a:ext cx="1426464" cy="420624"/>
-          </a:xfrm>
-          <a:prstGeom prst="roundRect">
-            <a:avLst>
-              <a:gd name="adj" fmla="val 6000"/>
-            </a:avLst>
-          </a:prstGeom>
-          <a:solidFill>
-            <a:srgbClr val="EFF6FF"/>
-          </a:solidFill>
-          <a:ln>
-            <a:noFill/>
-          </a:ln>
-          <a:effectLst/>
-        </p:spPr>
-        <p:style>
-          <a:lnRef idx="1">
-            <a:schemeClr val="accent1"/>
-          </a:lnRef>
-          <a:fillRef idx="3">
-            <a:schemeClr val="accent1"/>
-          </a:fillRef>
-          <a:effectRef idx="2">
-            <a:schemeClr val="accent1"/>
-          </a:effectRef>
-          <a:fontRef idx="minor">
-            <a:schemeClr val="lt1"/>
-          </a:fontRef>
-        </p:style>
-        <p:txBody>
-          <a:bodyPr rtlCol="0" anchor="ctr"/>
-          <a:lstStyle/>
-          <a:p>
-            <a:pPr algn="ctr"/>
-          </a:p>
-        </p:txBody>
-      </p:sp>
-      <p:sp>
-        <p:nvSpPr>
-          <p:cNvPr id="14" name="TextBox 13"/>
-          <p:cNvSpPr txBox="1"/>
-          <p:nvPr/>
-        </p:nvSpPr>
-        <p:spPr>
-          <a:xfrm>
-            <a:off x="3108962" y="2002536"/>
-            <a:ext cx="1426464" cy="420624"/>
-          </a:xfrm>
-          <a:prstGeom prst="rect">
-            <a:avLst/>
-          </a:prstGeom>
-          <a:noFill/>
-        </p:spPr>
-        <p:txBody>
-          <a:bodyPr wrap="square" anchor="ctr" lIns="0" rIns="0" tIns="0" bIns="0">
-            <a:spAutoFit/>
-          </a:bodyPr>
-          <a:lstStyle/>
-          <a:p>
-            <a:pPr algn="ctr">
-              <a:lnSpc>
-                <a:spcPct val="108000"/>
-              </a:lnSpc>
-            </a:pPr>
-            <a:r>
-              <a:rPr sz="1250" b="0" i="0">
-                <a:solidFill>
-                  <a:srgbClr val="1E3A8A"/>
-                </a:solidFill>
-                <a:latin typeface="Segoe UI"/>
-              </a:rPr>
-              <a:t>WhatsApp Bot</a:t>
-            </a:r>
-          </a:p>
-        </p:txBody>
-      </p:sp>
-      <p:sp>
-        <p:nvSpPr>
-          <p:cNvPr id="15" name="Down Arrow 14"/>
-          <p:cNvSpPr/>
-          <p:nvPr/>
-        </p:nvSpPr>
-        <p:spPr>
-          <a:xfrm>
-            <a:off x="1627632" y="2606040"/>
-            <a:ext cx="274320" cy="155448"/>
+            <a:off x="1627632" y="2459736"/>
+            <a:ext cx="274320" cy="164592"/>
           </a:xfrm>
           <a:prstGeom prst="downArrow">
             <a:avLst/>
@@ -7969,14 +7407,14 @@
       </p:sp>
       <p:sp>
         <p:nvSpPr>
-          <p:cNvPr id="16" name="Rounded Rectangle 15"/>
+          <p:cNvPr id="11" name="Rounded Rectangle 10"/>
           <p:cNvSpPr/>
           <p:nvPr/>
         </p:nvSpPr>
         <p:spPr>
           <a:xfrm>
-            <a:off x="548640" y="2734056"/>
-            <a:ext cx="2331720" cy="841248"/>
+            <a:off x="548640" y="2596896"/>
+            <a:ext cx="2331720" cy="786384"/>
           </a:xfrm>
           <a:prstGeom prst="roundRect">
             <a:avLst>
@@ -8017,14 +7455,14 @@
       </p:sp>
       <p:sp>
         <p:nvSpPr>
-          <p:cNvPr id="17" name="TextBox 16"/>
-          <p:cNvSpPr txBox="1"/>
-          <p:nvPr/>
-        </p:nvSpPr>
-        <p:spPr>
-          <a:xfrm>
-            <a:off x="713232" y="2825496"/>
-            <a:ext cx="2011680" cy="320040"/>
+          <p:cNvPr id="12" name="TextBox 11"/>
+          <p:cNvSpPr txBox="1"/>
+          <p:nvPr/>
+        </p:nvSpPr>
+        <p:spPr>
+          <a:xfrm>
+            <a:off x="713232" y="2670048"/>
+            <a:ext cx="2011680" cy="292608"/>
           </a:xfrm>
           <a:prstGeom prst="rect">
             <a:avLst/>
@@ -8056,13 +7494,13 @@
       </p:sp>
       <p:sp>
         <p:nvSpPr>
-          <p:cNvPr id="18" name="TextBox 17"/>
-          <p:cNvSpPr txBox="1"/>
-          <p:nvPr/>
-        </p:nvSpPr>
-        <p:spPr>
-          <a:xfrm>
-            <a:off x="713232" y="3063240"/>
+          <p:cNvPr id="13" name="TextBox 12"/>
+          <p:cNvSpPr txBox="1"/>
+          <p:nvPr/>
+        </p:nvSpPr>
+        <p:spPr>
+          <a:xfrm>
+            <a:off x="713232" y="2889504"/>
             <a:ext cx="2011680" cy="457200"/>
           </a:xfrm>
           <a:prstGeom prst="rect">
@@ -8095,14 +7533,14 @@
       </p:sp>
       <p:sp>
         <p:nvSpPr>
-          <p:cNvPr id="19" name="Rounded Rectangle 18"/>
+          <p:cNvPr id="14" name="Rounded Rectangle 13"/>
           <p:cNvSpPr/>
           <p:nvPr/>
         </p:nvSpPr>
         <p:spPr>
           <a:xfrm>
-            <a:off x="3063240" y="2734056"/>
-            <a:ext cx="8577072" cy="841248"/>
+            <a:off x="3063240" y="2596896"/>
+            <a:ext cx="8577072" cy="786384"/>
           </a:xfrm>
           <a:prstGeom prst="roundRect">
             <a:avLst>
@@ -8143,439 +7581,53 @@
       </p:sp>
       <p:sp>
         <p:nvSpPr>
-          <p:cNvPr id="20" name="Rounded Rectangle 19"/>
+          <p:cNvPr id="15" name="TextBox 14"/>
+          <p:cNvSpPr txBox="1"/>
+          <p:nvPr/>
+        </p:nvSpPr>
+        <p:spPr>
+          <a:xfrm>
+            <a:off x="3337560" y="2596896"/>
+            <a:ext cx="8028432" cy="786384"/>
+          </a:xfrm>
+          <a:prstGeom prst="rect">
+            <a:avLst/>
+          </a:prstGeom>
+          <a:noFill/>
+        </p:spPr>
+        <p:txBody>
+          <a:bodyPr wrap="square" anchor="ctr" lIns="0" rIns="0" tIns="0" bIns="0">
+            <a:spAutoFit/>
+          </a:bodyPr>
+          <a:lstStyle/>
+          <a:p>
+            <a:pPr algn="l">
+              <a:lnSpc>
+                <a:spcPct val="115000"/>
+              </a:lnSpc>
+            </a:pPr>
+            <a:r>
+              <a:rPr sz="1400" b="0" i="0">
+                <a:solidFill>
+                  <a:srgbClr val="78350F"/>
+                </a:solidFill>
+                <a:latin typeface="Segoe UI"/>
+              </a:rPr>
+              <a:t>/normalize  ·  /risk-score  ·  /ner  ·  /analyze  ·  /feedback</a:t>
+            </a:r>
+          </a:p>
+        </p:txBody>
+      </p:sp>
+      <p:sp>
+        <p:nvSpPr>
+          <p:cNvPr id="16" name="Down Arrow 15"/>
           <p:cNvSpPr/>
           <p:nvPr/>
         </p:nvSpPr>
         <p:spPr>
           <a:xfrm>
-            <a:off x="3" y="2953512"/>
-            <a:ext cx="1234440" cy="420624"/>
-          </a:xfrm>
-          <a:prstGeom prst="roundRect">
-            <a:avLst>
-              <a:gd name="adj" fmla="val 6000"/>
-            </a:avLst>
-          </a:prstGeom>
-          <a:solidFill>
-            <a:srgbClr val="FFFBEB"/>
-          </a:solidFill>
-          <a:ln>
-            <a:noFill/>
-          </a:ln>
-          <a:effectLst/>
-        </p:spPr>
-        <p:style>
-          <a:lnRef idx="1">
-            <a:schemeClr val="accent1"/>
-          </a:lnRef>
-          <a:fillRef idx="3">
-            <a:schemeClr val="accent1"/>
-          </a:fillRef>
-          <a:effectRef idx="2">
-            <a:schemeClr val="accent1"/>
-          </a:effectRef>
-          <a:fontRef idx="minor">
-            <a:schemeClr val="lt1"/>
-          </a:fontRef>
-        </p:style>
-        <p:txBody>
-          <a:bodyPr rtlCol="0" anchor="ctr"/>
-          <a:lstStyle/>
-          <a:p>
-            <a:pPr algn="ctr"/>
-          </a:p>
-        </p:txBody>
-      </p:sp>
-      <p:sp>
-        <p:nvSpPr>
-          <p:cNvPr id="21" name="TextBox 20"/>
-          <p:cNvSpPr txBox="1"/>
-          <p:nvPr/>
-        </p:nvSpPr>
-        <p:spPr>
-          <a:xfrm>
-            <a:off x="3" y="2953512"/>
-            <a:ext cx="1234440" cy="420624"/>
-          </a:xfrm>
-          <a:prstGeom prst="rect">
-            <a:avLst/>
-          </a:prstGeom>
-          <a:noFill/>
-        </p:spPr>
-        <p:txBody>
-          <a:bodyPr wrap="square" anchor="ctr" lIns="0" rIns="0" tIns="0" bIns="0">
-            <a:spAutoFit/>
-          </a:bodyPr>
-          <a:lstStyle/>
-          <a:p>
-            <a:pPr algn="ctr">
-              <a:lnSpc>
-                <a:spcPct val="108000"/>
-              </a:lnSpc>
-            </a:pPr>
-            <a:r>
-              <a:rPr sz="1250" b="0" i="0">
-                <a:solidFill>
-                  <a:srgbClr val="78350F"/>
-                </a:solidFill>
-                <a:latin typeface="Segoe UI"/>
-              </a:rPr>
-              <a:t>/normalize</a:t>
-            </a:r>
-          </a:p>
-        </p:txBody>
-      </p:sp>
-      <p:sp>
-        <p:nvSpPr>
-          <p:cNvPr id="22" name="Rounded Rectangle 21"/>
-          <p:cNvSpPr/>
-          <p:nvPr/>
-        </p:nvSpPr>
-        <p:spPr>
-          <a:xfrm>
-            <a:off x="1362459" y="2953512"/>
-            <a:ext cx="1330452" cy="420624"/>
-          </a:xfrm>
-          <a:prstGeom prst="roundRect">
-            <a:avLst>
-              <a:gd name="adj" fmla="val 6000"/>
-            </a:avLst>
-          </a:prstGeom>
-          <a:solidFill>
-            <a:srgbClr val="FFFBEB"/>
-          </a:solidFill>
-          <a:ln>
-            <a:noFill/>
-          </a:ln>
-          <a:effectLst/>
-        </p:spPr>
-        <p:style>
-          <a:lnRef idx="1">
-            <a:schemeClr val="accent1"/>
-          </a:lnRef>
-          <a:fillRef idx="3">
-            <a:schemeClr val="accent1"/>
-          </a:fillRef>
-          <a:effectRef idx="2">
-            <a:schemeClr val="accent1"/>
-          </a:effectRef>
-          <a:fontRef idx="minor">
-            <a:schemeClr val="lt1"/>
-          </a:fontRef>
-        </p:style>
-        <p:txBody>
-          <a:bodyPr rtlCol="0" anchor="ctr"/>
-          <a:lstStyle/>
-          <a:p>
-            <a:pPr algn="ctr"/>
-          </a:p>
-        </p:txBody>
-      </p:sp>
-      <p:sp>
-        <p:nvSpPr>
-          <p:cNvPr id="23" name="TextBox 22"/>
-          <p:cNvSpPr txBox="1"/>
-          <p:nvPr/>
-        </p:nvSpPr>
-        <p:spPr>
-          <a:xfrm>
-            <a:off x="1362459" y="2953512"/>
-            <a:ext cx="1330452" cy="420624"/>
-          </a:xfrm>
-          <a:prstGeom prst="rect">
-            <a:avLst/>
-          </a:prstGeom>
-          <a:noFill/>
-        </p:spPr>
-        <p:txBody>
-          <a:bodyPr wrap="square" anchor="ctr" lIns="0" rIns="0" tIns="0" bIns="0">
-            <a:spAutoFit/>
-          </a:bodyPr>
-          <a:lstStyle/>
-          <a:p>
-            <a:pPr algn="ctr">
-              <a:lnSpc>
-                <a:spcPct val="108000"/>
-              </a:lnSpc>
-            </a:pPr>
-            <a:r>
-              <a:rPr sz="1250" b="0" i="0">
-                <a:solidFill>
-                  <a:srgbClr val="78350F"/>
-                </a:solidFill>
-                <a:latin typeface="Segoe UI"/>
-              </a:rPr>
-              <a:t>/risk-score</a:t>
-            </a:r>
-          </a:p>
-        </p:txBody>
-      </p:sp>
-      <p:sp>
-        <p:nvSpPr>
-          <p:cNvPr id="24" name="Rounded Rectangle 23"/>
-          <p:cNvSpPr/>
-          <p:nvPr/>
-        </p:nvSpPr>
-        <p:spPr>
-          <a:xfrm>
-            <a:off x="2820927" y="2953512"/>
-            <a:ext cx="658368" cy="420624"/>
-          </a:xfrm>
-          <a:prstGeom prst="roundRect">
-            <a:avLst>
-              <a:gd name="adj" fmla="val 6000"/>
-            </a:avLst>
-          </a:prstGeom>
-          <a:solidFill>
-            <a:srgbClr val="FFFBEB"/>
-          </a:solidFill>
-          <a:ln>
-            <a:noFill/>
-          </a:ln>
-          <a:effectLst/>
-        </p:spPr>
-        <p:style>
-          <a:lnRef idx="1">
-            <a:schemeClr val="accent1"/>
-          </a:lnRef>
-          <a:fillRef idx="3">
-            <a:schemeClr val="accent1"/>
-          </a:fillRef>
-          <a:effectRef idx="2">
-            <a:schemeClr val="accent1"/>
-          </a:effectRef>
-          <a:fontRef idx="minor">
-            <a:schemeClr val="lt1"/>
-          </a:fontRef>
-        </p:style>
-        <p:txBody>
-          <a:bodyPr rtlCol="0" anchor="ctr"/>
-          <a:lstStyle/>
-          <a:p>
-            <a:pPr algn="ctr"/>
-          </a:p>
-        </p:txBody>
-      </p:sp>
-      <p:sp>
-        <p:nvSpPr>
-          <p:cNvPr id="25" name="TextBox 24"/>
-          <p:cNvSpPr txBox="1"/>
-          <p:nvPr/>
-        </p:nvSpPr>
-        <p:spPr>
-          <a:xfrm>
-            <a:off x="2820927" y="2953512"/>
-            <a:ext cx="658368" cy="420624"/>
-          </a:xfrm>
-          <a:prstGeom prst="rect">
-            <a:avLst/>
-          </a:prstGeom>
-          <a:noFill/>
-        </p:spPr>
-        <p:txBody>
-          <a:bodyPr wrap="square" anchor="ctr" lIns="0" rIns="0" tIns="0" bIns="0">
-            <a:spAutoFit/>
-          </a:bodyPr>
-          <a:lstStyle/>
-          <a:p>
-            <a:pPr algn="ctr">
-              <a:lnSpc>
-                <a:spcPct val="108000"/>
-              </a:lnSpc>
-            </a:pPr>
-            <a:r>
-              <a:rPr sz="1250" b="0" i="0">
-                <a:solidFill>
-                  <a:srgbClr val="78350F"/>
-                </a:solidFill>
-                <a:latin typeface="Segoe UI"/>
-              </a:rPr>
-              <a:t>/ner</a:t>
-            </a:r>
-          </a:p>
-        </p:txBody>
-      </p:sp>
-      <p:sp>
-        <p:nvSpPr>
-          <p:cNvPr id="26" name="Rounded Rectangle 25"/>
-          <p:cNvSpPr/>
-          <p:nvPr/>
-        </p:nvSpPr>
-        <p:spPr>
-          <a:xfrm>
-            <a:off x="3607311" y="2953512"/>
-            <a:ext cx="1042415" cy="420624"/>
-          </a:xfrm>
-          <a:prstGeom prst="roundRect">
-            <a:avLst>
-              <a:gd name="adj" fmla="val 6000"/>
-            </a:avLst>
-          </a:prstGeom>
-          <a:solidFill>
-            <a:srgbClr val="FFFBEB"/>
-          </a:solidFill>
-          <a:ln>
-            <a:noFill/>
-          </a:ln>
-          <a:effectLst/>
-        </p:spPr>
-        <p:style>
-          <a:lnRef idx="1">
-            <a:schemeClr val="accent1"/>
-          </a:lnRef>
-          <a:fillRef idx="3">
-            <a:schemeClr val="accent1"/>
-          </a:fillRef>
-          <a:effectRef idx="2">
-            <a:schemeClr val="accent1"/>
-          </a:effectRef>
-          <a:fontRef idx="minor">
-            <a:schemeClr val="lt1"/>
-          </a:fontRef>
-        </p:style>
-        <p:txBody>
-          <a:bodyPr rtlCol="0" anchor="ctr"/>
-          <a:lstStyle/>
-          <a:p>
-            <a:pPr algn="ctr"/>
-          </a:p>
-        </p:txBody>
-      </p:sp>
-      <p:sp>
-        <p:nvSpPr>
-          <p:cNvPr id="27" name="TextBox 26"/>
-          <p:cNvSpPr txBox="1"/>
-          <p:nvPr/>
-        </p:nvSpPr>
-        <p:spPr>
-          <a:xfrm>
-            <a:off x="3607311" y="2953512"/>
-            <a:ext cx="1042415" cy="420624"/>
-          </a:xfrm>
-          <a:prstGeom prst="rect">
-            <a:avLst/>
-          </a:prstGeom>
-          <a:noFill/>
-        </p:spPr>
-        <p:txBody>
-          <a:bodyPr wrap="square" anchor="ctr" lIns="0" rIns="0" tIns="0" bIns="0">
-            <a:spAutoFit/>
-          </a:bodyPr>
-          <a:lstStyle/>
-          <a:p>
-            <a:pPr algn="ctr">
-              <a:lnSpc>
-                <a:spcPct val="108000"/>
-              </a:lnSpc>
-            </a:pPr>
-            <a:r>
-              <a:rPr sz="1250" b="0" i="0">
-                <a:solidFill>
-                  <a:srgbClr val="78350F"/>
-                </a:solidFill>
-                <a:latin typeface="Segoe UI"/>
-              </a:rPr>
-              <a:t>/analyze</a:t>
-            </a:r>
-          </a:p>
-        </p:txBody>
-      </p:sp>
-      <p:sp>
-        <p:nvSpPr>
-          <p:cNvPr id="28" name="Rounded Rectangle 27"/>
-          <p:cNvSpPr/>
-          <p:nvPr/>
-        </p:nvSpPr>
-        <p:spPr>
-          <a:xfrm>
-            <a:off x="4777742" y="2953512"/>
-            <a:ext cx="1138428" cy="420624"/>
-          </a:xfrm>
-          <a:prstGeom prst="roundRect">
-            <a:avLst>
-              <a:gd name="adj" fmla="val 6000"/>
-            </a:avLst>
-          </a:prstGeom>
-          <a:solidFill>
-            <a:srgbClr val="FFFBEB"/>
-          </a:solidFill>
-          <a:ln>
-            <a:noFill/>
-          </a:ln>
-          <a:effectLst/>
-        </p:spPr>
-        <p:style>
-          <a:lnRef idx="1">
-            <a:schemeClr val="accent1"/>
-          </a:lnRef>
-          <a:fillRef idx="3">
-            <a:schemeClr val="accent1"/>
-          </a:fillRef>
-          <a:effectRef idx="2">
-            <a:schemeClr val="accent1"/>
-          </a:effectRef>
-          <a:fontRef idx="minor">
-            <a:schemeClr val="lt1"/>
-          </a:fontRef>
-        </p:style>
-        <p:txBody>
-          <a:bodyPr rtlCol="0" anchor="ctr"/>
-          <a:lstStyle/>
-          <a:p>
-            <a:pPr algn="ctr"/>
-          </a:p>
-        </p:txBody>
-      </p:sp>
-      <p:sp>
-        <p:nvSpPr>
-          <p:cNvPr id="29" name="TextBox 28"/>
-          <p:cNvSpPr txBox="1"/>
-          <p:nvPr/>
-        </p:nvSpPr>
-        <p:spPr>
-          <a:xfrm>
-            <a:off x="4777742" y="2953512"/>
-            <a:ext cx="1138428" cy="420624"/>
-          </a:xfrm>
-          <a:prstGeom prst="rect">
-            <a:avLst/>
-          </a:prstGeom>
-          <a:noFill/>
-        </p:spPr>
-        <p:txBody>
-          <a:bodyPr wrap="square" anchor="ctr" lIns="0" rIns="0" tIns="0" bIns="0">
-            <a:spAutoFit/>
-          </a:bodyPr>
-          <a:lstStyle/>
-          <a:p>
-            <a:pPr algn="ctr">
-              <a:lnSpc>
-                <a:spcPct val="108000"/>
-              </a:lnSpc>
-            </a:pPr>
-            <a:r>
-              <a:rPr sz="1250" b="0" i="0">
-                <a:solidFill>
-                  <a:srgbClr val="78350F"/>
-                </a:solidFill>
-                <a:latin typeface="Segoe UI"/>
-              </a:rPr>
-              <a:t>/feedback</a:t>
-            </a:r>
-          </a:p>
-        </p:txBody>
-      </p:sp>
-      <p:sp>
-        <p:nvSpPr>
-          <p:cNvPr id="30" name="Down Arrow 29"/>
-          <p:cNvSpPr/>
-          <p:nvPr/>
-        </p:nvSpPr>
-        <p:spPr>
-          <a:xfrm>
-            <a:off x="1627632" y="3557016"/>
-            <a:ext cx="274320" cy="155448"/>
+            <a:off x="1627632" y="3364992"/>
+            <a:ext cx="274320" cy="164592"/>
           </a:xfrm>
           <a:prstGeom prst="downArrow">
             <a:avLst/>
@@ -8611,14 +7663,14 @@
       </p:sp>
       <p:sp>
         <p:nvSpPr>
-          <p:cNvPr id="31" name="Rounded Rectangle 30"/>
+          <p:cNvPr id="17" name="Rounded Rectangle 16"/>
           <p:cNvSpPr/>
           <p:nvPr/>
         </p:nvSpPr>
         <p:spPr>
           <a:xfrm>
-            <a:off x="548640" y="3685032"/>
-            <a:ext cx="2331720" cy="841248"/>
+            <a:off x="548640" y="3502152"/>
+            <a:ext cx="2331720" cy="786384"/>
           </a:xfrm>
           <a:prstGeom prst="roundRect">
             <a:avLst>
@@ -8659,14 +7711,14 @@
       </p:sp>
       <p:sp>
         <p:nvSpPr>
-          <p:cNvPr id="32" name="TextBox 31"/>
-          <p:cNvSpPr txBox="1"/>
-          <p:nvPr/>
-        </p:nvSpPr>
-        <p:spPr>
-          <a:xfrm>
-            <a:off x="713232" y="3776472"/>
-            <a:ext cx="2011680" cy="320040"/>
+          <p:cNvPr id="18" name="TextBox 17"/>
+          <p:cNvSpPr txBox="1"/>
+          <p:nvPr/>
+        </p:nvSpPr>
+        <p:spPr>
+          <a:xfrm>
+            <a:off x="713232" y="3575304"/>
+            <a:ext cx="2011680" cy="292608"/>
           </a:xfrm>
           <a:prstGeom prst="rect">
             <a:avLst/>
@@ -8698,13 +7750,13 @@
       </p:sp>
       <p:sp>
         <p:nvSpPr>
-          <p:cNvPr id="33" name="TextBox 32"/>
-          <p:cNvSpPr txBox="1"/>
-          <p:nvPr/>
-        </p:nvSpPr>
-        <p:spPr>
-          <a:xfrm>
-            <a:off x="713232" y="4014216"/>
+          <p:cNvPr id="19" name="TextBox 18"/>
+          <p:cNvSpPr txBox="1"/>
+          <p:nvPr/>
+        </p:nvSpPr>
+        <p:spPr>
+          <a:xfrm>
+            <a:off x="713232" y="3794760"/>
             <a:ext cx="2011680" cy="457200"/>
           </a:xfrm>
           <a:prstGeom prst="rect">
@@ -8737,14 +7789,14 @@
       </p:sp>
       <p:sp>
         <p:nvSpPr>
-          <p:cNvPr id="34" name="Rounded Rectangle 33"/>
+          <p:cNvPr id="20" name="Rounded Rectangle 19"/>
           <p:cNvSpPr/>
           <p:nvPr/>
         </p:nvSpPr>
         <p:spPr>
           <a:xfrm>
-            <a:off x="3063240" y="3685032"/>
-            <a:ext cx="8577072" cy="841248"/>
+            <a:off x="3063240" y="3502152"/>
+            <a:ext cx="8577072" cy="786384"/>
           </a:xfrm>
           <a:prstGeom prst="roundRect">
             <a:avLst>
@@ -8785,269 +7837,53 @@
       </p:sp>
       <p:sp>
         <p:nvSpPr>
-          <p:cNvPr id="35" name="Rounded Rectangle 34"/>
+          <p:cNvPr id="21" name="TextBox 20"/>
+          <p:cNvSpPr txBox="1"/>
+          <p:nvPr/>
+        </p:nvSpPr>
+        <p:spPr>
+          <a:xfrm>
+            <a:off x="3337560" y="3502152"/>
+            <a:ext cx="8028432" cy="786384"/>
+          </a:xfrm>
+          <a:prstGeom prst="rect">
+            <a:avLst/>
+          </a:prstGeom>
+          <a:noFill/>
+        </p:spPr>
+        <p:txBody>
+          <a:bodyPr wrap="square" anchor="ctr" lIns="0" rIns="0" tIns="0" bIns="0">
+            <a:spAutoFit/>
+          </a:bodyPr>
+          <a:lstStyle/>
+          <a:p>
+            <a:pPr algn="l">
+              <a:lnSpc>
+                <a:spcPct val="115000"/>
+              </a:lnSpc>
+            </a:pPr>
+            <a:r>
+              <a:rPr sz="1400" b="0" i="0">
+                <a:solidFill>
+                  <a:srgbClr val="581C87"/>
+                </a:solidFill>
+                <a:latin typeface="Segoe UI"/>
+              </a:rPr>
+              <a:t>Lazy-loads models  ·  Orchestrates pipeline  ·  Graceful fallback</a:t>
+            </a:r>
+          </a:p>
+        </p:txBody>
+      </p:sp>
+      <p:sp>
+        <p:nvSpPr>
+          <p:cNvPr id="22" name="Down Arrow 21"/>
           <p:cNvSpPr/>
           <p:nvPr/>
         </p:nvSpPr>
         <p:spPr>
           <a:xfrm>
-            <a:off x="3" y="3904488"/>
-            <a:ext cx="1906524" cy="420624"/>
-          </a:xfrm>
-          <a:prstGeom prst="roundRect">
-            <a:avLst>
-              <a:gd name="adj" fmla="val 6000"/>
-            </a:avLst>
-          </a:prstGeom>
-          <a:solidFill>
-            <a:srgbClr val="FDF4FF"/>
-          </a:solidFill>
-          <a:ln>
-            <a:noFill/>
-          </a:ln>
-          <a:effectLst/>
-        </p:spPr>
-        <p:style>
-          <a:lnRef idx="1">
-            <a:schemeClr val="accent1"/>
-          </a:lnRef>
-          <a:fillRef idx="3">
-            <a:schemeClr val="accent1"/>
-          </a:fillRef>
-          <a:effectRef idx="2">
-            <a:schemeClr val="accent1"/>
-          </a:effectRef>
-          <a:fontRef idx="minor">
-            <a:schemeClr val="lt1"/>
-          </a:fontRef>
-        </p:style>
-        <p:txBody>
-          <a:bodyPr rtlCol="0" anchor="ctr"/>
-          <a:lstStyle/>
-          <a:p>
-            <a:pPr algn="ctr"/>
-          </a:p>
-        </p:txBody>
-      </p:sp>
-      <p:sp>
-        <p:nvSpPr>
-          <p:cNvPr id="36" name="TextBox 35"/>
-          <p:cNvSpPr txBox="1"/>
-          <p:nvPr/>
-        </p:nvSpPr>
-        <p:spPr>
-          <a:xfrm>
-            <a:off x="3" y="3904488"/>
-            <a:ext cx="1906524" cy="420624"/>
-          </a:xfrm>
-          <a:prstGeom prst="rect">
-            <a:avLst/>
-          </a:prstGeom>
-          <a:noFill/>
-        </p:spPr>
-        <p:txBody>
-          <a:bodyPr wrap="square" anchor="ctr" lIns="0" rIns="0" tIns="0" bIns="0">
-            <a:spAutoFit/>
-          </a:bodyPr>
-          <a:lstStyle/>
-          <a:p>
-            <a:pPr algn="ctr">
-              <a:lnSpc>
-                <a:spcPct val="108000"/>
-              </a:lnSpc>
-            </a:pPr>
-            <a:r>
-              <a:rPr sz="1250" b="0" i="0">
-                <a:solidFill>
-                  <a:srgbClr val="581C87"/>
-                </a:solidFill>
-                <a:latin typeface="Segoe UI"/>
-              </a:rPr>
-              <a:t>Lazy-loads models</a:t>
-            </a:r>
-          </a:p>
-        </p:txBody>
-      </p:sp>
-      <p:sp>
-        <p:nvSpPr>
-          <p:cNvPr id="37" name="Rounded Rectangle 36"/>
-          <p:cNvSpPr/>
-          <p:nvPr/>
-        </p:nvSpPr>
-        <p:spPr>
-          <a:xfrm>
-            <a:off x="2034543" y="3904488"/>
-            <a:ext cx="2290572" cy="420624"/>
-          </a:xfrm>
-          <a:prstGeom prst="roundRect">
-            <a:avLst>
-              <a:gd name="adj" fmla="val 6000"/>
-            </a:avLst>
-          </a:prstGeom>
-          <a:solidFill>
-            <a:srgbClr val="FDF4FF"/>
-          </a:solidFill>
-          <a:ln>
-            <a:noFill/>
-          </a:ln>
-          <a:effectLst/>
-        </p:spPr>
-        <p:style>
-          <a:lnRef idx="1">
-            <a:schemeClr val="accent1"/>
-          </a:lnRef>
-          <a:fillRef idx="3">
-            <a:schemeClr val="accent1"/>
-          </a:fillRef>
-          <a:effectRef idx="2">
-            <a:schemeClr val="accent1"/>
-          </a:effectRef>
-          <a:fontRef idx="minor">
-            <a:schemeClr val="lt1"/>
-          </a:fontRef>
-        </p:style>
-        <p:txBody>
-          <a:bodyPr rtlCol="0" anchor="ctr"/>
-          <a:lstStyle/>
-          <a:p>
-            <a:pPr algn="ctr"/>
-          </a:p>
-        </p:txBody>
-      </p:sp>
-      <p:sp>
-        <p:nvSpPr>
-          <p:cNvPr id="38" name="TextBox 37"/>
-          <p:cNvSpPr txBox="1"/>
-          <p:nvPr/>
-        </p:nvSpPr>
-        <p:spPr>
-          <a:xfrm>
-            <a:off x="2034543" y="3904488"/>
-            <a:ext cx="2290572" cy="420624"/>
-          </a:xfrm>
-          <a:prstGeom prst="rect">
-            <a:avLst/>
-          </a:prstGeom>
-          <a:noFill/>
-        </p:spPr>
-        <p:txBody>
-          <a:bodyPr wrap="square" anchor="ctr" lIns="0" rIns="0" tIns="0" bIns="0">
-            <a:spAutoFit/>
-          </a:bodyPr>
-          <a:lstStyle/>
-          <a:p>
-            <a:pPr algn="ctr">
-              <a:lnSpc>
-                <a:spcPct val="108000"/>
-              </a:lnSpc>
-            </a:pPr>
-            <a:r>
-              <a:rPr sz="1250" b="0" i="0">
-                <a:solidFill>
-                  <a:srgbClr val="581C87"/>
-                </a:solidFill>
-                <a:latin typeface="Segoe UI"/>
-              </a:rPr>
-              <a:t>Orchestrates pipeline</a:t>
-            </a:r>
-          </a:p>
-        </p:txBody>
-      </p:sp>
-      <p:sp>
-        <p:nvSpPr>
-          <p:cNvPr id="39" name="Rounded Rectangle 38"/>
-          <p:cNvSpPr/>
-          <p:nvPr/>
-        </p:nvSpPr>
-        <p:spPr>
-          <a:xfrm>
-            <a:off x="4453131" y="3904488"/>
-            <a:ext cx="1906524" cy="420624"/>
-          </a:xfrm>
-          <a:prstGeom prst="roundRect">
-            <a:avLst>
-              <a:gd name="adj" fmla="val 6000"/>
-            </a:avLst>
-          </a:prstGeom>
-          <a:solidFill>
-            <a:srgbClr val="FDF4FF"/>
-          </a:solidFill>
-          <a:ln>
-            <a:noFill/>
-          </a:ln>
-          <a:effectLst/>
-        </p:spPr>
-        <p:style>
-          <a:lnRef idx="1">
-            <a:schemeClr val="accent1"/>
-          </a:lnRef>
-          <a:fillRef idx="3">
-            <a:schemeClr val="accent1"/>
-          </a:fillRef>
-          <a:effectRef idx="2">
-            <a:schemeClr val="accent1"/>
-          </a:effectRef>
-          <a:fontRef idx="minor">
-            <a:schemeClr val="lt1"/>
-          </a:fontRef>
-        </p:style>
-        <p:txBody>
-          <a:bodyPr rtlCol="0" anchor="ctr"/>
-          <a:lstStyle/>
-          <a:p>
-            <a:pPr algn="ctr"/>
-          </a:p>
-        </p:txBody>
-      </p:sp>
-      <p:sp>
-        <p:nvSpPr>
-          <p:cNvPr id="40" name="TextBox 39"/>
-          <p:cNvSpPr txBox="1"/>
-          <p:nvPr/>
-        </p:nvSpPr>
-        <p:spPr>
-          <a:xfrm>
-            <a:off x="4453131" y="3904488"/>
-            <a:ext cx="1906524" cy="420624"/>
-          </a:xfrm>
-          <a:prstGeom prst="rect">
-            <a:avLst/>
-          </a:prstGeom>
-          <a:noFill/>
-        </p:spPr>
-        <p:txBody>
-          <a:bodyPr wrap="square" anchor="ctr" lIns="0" rIns="0" tIns="0" bIns="0">
-            <a:spAutoFit/>
-          </a:bodyPr>
-          <a:lstStyle/>
-          <a:p>
-            <a:pPr algn="ctr">
-              <a:lnSpc>
-                <a:spcPct val="108000"/>
-              </a:lnSpc>
-            </a:pPr>
-            <a:r>
-              <a:rPr sz="1250" b="0" i="0">
-                <a:solidFill>
-                  <a:srgbClr val="581C87"/>
-                </a:solidFill>
-                <a:latin typeface="Segoe UI"/>
-              </a:rPr>
-              <a:t>Graceful fallback</a:t>
-            </a:r>
-          </a:p>
-        </p:txBody>
-      </p:sp>
-      <p:sp>
-        <p:nvSpPr>
-          <p:cNvPr id="41" name="Down Arrow 40"/>
-          <p:cNvSpPr/>
-          <p:nvPr/>
-        </p:nvSpPr>
-        <p:spPr>
-          <a:xfrm>
-            <a:off x="1627632" y="4507992"/>
-            <a:ext cx="274320" cy="155448"/>
+            <a:off x="1627632" y="4270248"/>
+            <a:ext cx="274320" cy="164592"/>
           </a:xfrm>
           <a:prstGeom prst="downArrow">
             <a:avLst/>
@@ -9083,14 +7919,14 @@
       </p:sp>
       <p:sp>
         <p:nvSpPr>
-          <p:cNvPr id="42" name="Rounded Rectangle 41"/>
+          <p:cNvPr id="23" name="Rounded Rectangle 22"/>
           <p:cNvSpPr/>
           <p:nvPr/>
         </p:nvSpPr>
         <p:spPr>
           <a:xfrm>
-            <a:off x="548640" y="4636008"/>
-            <a:ext cx="2331720" cy="841248"/>
+            <a:off x="548640" y="4407408"/>
+            <a:ext cx="2331720" cy="786384"/>
           </a:xfrm>
           <a:prstGeom prst="roundRect">
             <a:avLst>
@@ -9131,14 +7967,14 @@
       </p:sp>
       <p:sp>
         <p:nvSpPr>
-          <p:cNvPr id="43" name="TextBox 42"/>
-          <p:cNvSpPr txBox="1"/>
-          <p:nvPr/>
-        </p:nvSpPr>
-        <p:spPr>
-          <a:xfrm>
-            <a:off x="713232" y="4727448"/>
-            <a:ext cx="2011680" cy="320040"/>
+          <p:cNvPr id="24" name="TextBox 23"/>
+          <p:cNvSpPr txBox="1"/>
+          <p:nvPr/>
+        </p:nvSpPr>
+        <p:spPr>
+          <a:xfrm>
+            <a:off x="713232" y="4480560"/>
+            <a:ext cx="2011680" cy="292608"/>
           </a:xfrm>
           <a:prstGeom prst="rect">
             <a:avLst/>
@@ -9170,13 +8006,13 @@
       </p:sp>
       <p:sp>
         <p:nvSpPr>
-          <p:cNvPr id="44" name="TextBox 43"/>
-          <p:cNvSpPr txBox="1"/>
-          <p:nvPr/>
-        </p:nvSpPr>
-        <p:spPr>
-          <a:xfrm>
-            <a:off x="713232" y="4965192"/>
+          <p:cNvPr id="25" name="TextBox 24"/>
+          <p:cNvSpPr txBox="1"/>
+          <p:nvPr/>
+        </p:nvSpPr>
+        <p:spPr>
+          <a:xfrm>
+            <a:off x="713232" y="4700016"/>
             <a:ext cx="2011680" cy="457200"/>
           </a:xfrm>
           <a:prstGeom prst="rect">
@@ -9209,14 +8045,14 @@
       </p:sp>
       <p:sp>
         <p:nvSpPr>
-          <p:cNvPr id="45" name="Rounded Rectangle 44"/>
+          <p:cNvPr id="26" name="Rounded Rectangle 25"/>
           <p:cNvSpPr/>
           <p:nvPr/>
         </p:nvSpPr>
         <p:spPr>
           <a:xfrm>
-            <a:off x="3063240" y="4636008"/>
-            <a:ext cx="8577072" cy="841248"/>
+            <a:off x="3063240" y="4407408"/>
+            <a:ext cx="8577072" cy="786384"/>
           </a:xfrm>
           <a:prstGeom prst="roundRect">
             <a:avLst>
@@ -9257,439 +8093,53 @@
       </p:sp>
       <p:sp>
         <p:nvSpPr>
-          <p:cNvPr id="46" name="Rounded Rectangle 45"/>
+          <p:cNvPr id="27" name="TextBox 26"/>
+          <p:cNvSpPr txBox="1"/>
+          <p:nvPr/>
+        </p:nvSpPr>
+        <p:spPr>
+          <a:xfrm>
+            <a:off x="3337560" y="4407408"/>
+            <a:ext cx="8028432" cy="786384"/>
+          </a:xfrm>
+          <a:prstGeom prst="rect">
+            <a:avLst/>
+          </a:prstGeom>
+          <a:noFill/>
+        </p:spPr>
+        <p:txBody>
+          <a:bodyPr wrap="square" anchor="ctr" lIns="0" rIns="0" tIns="0" bIns="0">
+            <a:spAutoFit/>
+          </a:bodyPr>
+          <a:lstStyle/>
+          <a:p>
+            <a:pPr algn="l">
+              <a:lnSpc>
+                <a:spcPct val="115000"/>
+              </a:lnSpc>
+            </a:pPr>
+            <a:r>
+              <a:rPr sz="1400" b="0" i="0">
+                <a:solidFill>
+                  <a:srgbClr val="065F46"/>
+                </a:solidFill>
+                <a:latin typeface="Segoe UI"/>
+              </a:rPr>
+              <a:t>Normalizer  ·  Risk Scorer  ·  NER  ·  STT  ·  Simplify</a:t>
+            </a:r>
+          </a:p>
+        </p:txBody>
+      </p:sp>
+      <p:sp>
+        <p:nvSpPr>
+          <p:cNvPr id="28" name="Down Arrow 27"/>
           <p:cNvSpPr/>
           <p:nvPr/>
         </p:nvSpPr>
         <p:spPr>
           <a:xfrm>
-            <a:off x="3" y="4855464"/>
-            <a:ext cx="1234440" cy="420624"/>
-          </a:xfrm>
-          <a:prstGeom prst="roundRect">
-            <a:avLst>
-              <a:gd name="adj" fmla="val 6000"/>
-            </a:avLst>
-          </a:prstGeom>
-          <a:solidFill>
-            <a:srgbClr val="ECFDF5"/>
-          </a:solidFill>
-          <a:ln>
-            <a:noFill/>
-          </a:ln>
-          <a:effectLst/>
-        </p:spPr>
-        <p:style>
-          <a:lnRef idx="1">
-            <a:schemeClr val="accent1"/>
-          </a:lnRef>
-          <a:fillRef idx="3">
-            <a:schemeClr val="accent1"/>
-          </a:fillRef>
-          <a:effectRef idx="2">
-            <a:schemeClr val="accent1"/>
-          </a:effectRef>
-          <a:fontRef idx="minor">
-            <a:schemeClr val="lt1"/>
-          </a:fontRef>
-        </p:style>
-        <p:txBody>
-          <a:bodyPr rtlCol="0" anchor="ctr"/>
-          <a:lstStyle/>
-          <a:p>
-            <a:pPr algn="ctr"/>
-          </a:p>
-        </p:txBody>
-      </p:sp>
-      <p:sp>
-        <p:nvSpPr>
-          <p:cNvPr id="47" name="TextBox 46"/>
-          <p:cNvSpPr txBox="1"/>
-          <p:nvPr/>
-        </p:nvSpPr>
-        <p:spPr>
-          <a:xfrm>
-            <a:off x="3" y="4855464"/>
-            <a:ext cx="1234440" cy="420624"/>
-          </a:xfrm>
-          <a:prstGeom prst="rect">
-            <a:avLst/>
-          </a:prstGeom>
-          <a:noFill/>
-        </p:spPr>
-        <p:txBody>
-          <a:bodyPr wrap="square" anchor="ctr" lIns="0" rIns="0" tIns="0" bIns="0">
-            <a:spAutoFit/>
-          </a:bodyPr>
-          <a:lstStyle/>
-          <a:p>
-            <a:pPr algn="ctr">
-              <a:lnSpc>
-                <a:spcPct val="108000"/>
-              </a:lnSpc>
-            </a:pPr>
-            <a:r>
-              <a:rPr sz="1250" b="0" i="0">
-                <a:solidFill>
-                  <a:srgbClr val="065F46"/>
-                </a:solidFill>
-                <a:latin typeface="Segoe UI"/>
-              </a:rPr>
-              <a:t>Normalizer</a:t>
-            </a:r>
-          </a:p>
-        </p:txBody>
-      </p:sp>
-      <p:sp>
-        <p:nvSpPr>
-          <p:cNvPr id="48" name="Rounded Rectangle 47"/>
-          <p:cNvSpPr/>
-          <p:nvPr/>
-        </p:nvSpPr>
-        <p:spPr>
-          <a:xfrm>
-            <a:off x="1362459" y="4855464"/>
-            <a:ext cx="1330452" cy="420624"/>
-          </a:xfrm>
-          <a:prstGeom prst="roundRect">
-            <a:avLst>
-              <a:gd name="adj" fmla="val 6000"/>
-            </a:avLst>
-          </a:prstGeom>
-          <a:solidFill>
-            <a:srgbClr val="ECFDF5"/>
-          </a:solidFill>
-          <a:ln>
-            <a:noFill/>
-          </a:ln>
-          <a:effectLst/>
-        </p:spPr>
-        <p:style>
-          <a:lnRef idx="1">
-            <a:schemeClr val="accent1"/>
-          </a:lnRef>
-          <a:fillRef idx="3">
-            <a:schemeClr val="accent1"/>
-          </a:fillRef>
-          <a:effectRef idx="2">
-            <a:schemeClr val="accent1"/>
-          </a:effectRef>
-          <a:fontRef idx="minor">
-            <a:schemeClr val="lt1"/>
-          </a:fontRef>
-        </p:style>
-        <p:txBody>
-          <a:bodyPr rtlCol="0" anchor="ctr"/>
-          <a:lstStyle/>
-          <a:p>
-            <a:pPr algn="ctr"/>
-          </a:p>
-        </p:txBody>
-      </p:sp>
-      <p:sp>
-        <p:nvSpPr>
-          <p:cNvPr id="49" name="TextBox 48"/>
-          <p:cNvSpPr txBox="1"/>
-          <p:nvPr/>
-        </p:nvSpPr>
-        <p:spPr>
-          <a:xfrm>
-            <a:off x="1362459" y="4855464"/>
-            <a:ext cx="1330452" cy="420624"/>
-          </a:xfrm>
-          <a:prstGeom prst="rect">
-            <a:avLst/>
-          </a:prstGeom>
-          <a:noFill/>
-        </p:spPr>
-        <p:txBody>
-          <a:bodyPr wrap="square" anchor="ctr" lIns="0" rIns="0" tIns="0" bIns="0">
-            <a:spAutoFit/>
-          </a:bodyPr>
-          <a:lstStyle/>
-          <a:p>
-            <a:pPr algn="ctr">
-              <a:lnSpc>
-                <a:spcPct val="108000"/>
-              </a:lnSpc>
-            </a:pPr>
-            <a:r>
-              <a:rPr sz="1250" b="0" i="0">
-                <a:solidFill>
-                  <a:srgbClr val="065F46"/>
-                </a:solidFill>
-                <a:latin typeface="Segoe UI"/>
-              </a:rPr>
-              <a:t>Risk Scorer</a:t>
-            </a:r>
-          </a:p>
-        </p:txBody>
-      </p:sp>
-      <p:sp>
-        <p:nvSpPr>
-          <p:cNvPr id="50" name="Rounded Rectangle 49"/>
-          <p:cNvSpPr/>
-          <p:nvPr/>
-        </p:nvSpPr>
-        <p:spPr>
-          <a:xfrm>
-            <a:off x="2820927" y="4855464"/>
-            <a:ext cx="562356" cy="420624"/>
-          </a:xfrm>
-          <a:prstGeom prst="roundRect">
-            <a:avLst>
-              <a:gd name="adj" fmla="val 6000"/>
-            </a:avLst>
-          </a:prstGeom>
-          <a:solidFill>
-            <a:srgbClr val="ECFDF5"/>
-          </a:solidFill>
-          <a:ln>
-            <a:noFill/>
-          </a:ln>
-          <a:effectLst/>
-        </p:spPr>
-        <p:style>
-          <a:lnRef idx="1">
-            <a:schemeClr val="accent1"/>
-          </a:lnRef>
-          <a:fillRef idx="3">
-            <a:schemeClr val="accent1"/>
-          </a:fillRef>
-          <a:effectRef idx="2">
-            <a:schemeClr val="accent1"/>
-          </a:effectRef>
-          <a:fontRef idx="minor">
-            <a:schemeClr val="lt1"/>
-          </a:fontRef>
-        </p:style>
-        <p:txBody>
-          <a:bodyPr rtlCol="0" anchor="ctr"/>
-          <a:lstStyle/>
-          <a:p>
-            <a:pPr algn="ctr"/>
-          </a:p>
-        </p:txBody>
-      </p:sp>
-      <p:sp>
-        <p:nvSpPr>
-          <p:cNvPr id="51" name="TextBox 50"/>
-          <p:cNvSpPr txBox="1"/>
-          <p:nvPr/>
-        </p:nvSpPr>
-        <p:spPr>
-          <a:xfrm>
-            <a:off x="2820927" y="4855464"/>
-            <a:ext cx="562356" cy="420624"/>
-          </a:xfrm>
-          <a:prstGeom prst="rect">
-            <a:avLst/>
-          </a:prstGeom>
-          <a:noFill/>
-        </p:spPr>
-        <p:txBody>
-          <a:bodyPr wrap="square" anchor="ctr" lIns="0" rIns="0" tIns="0" bIns="0">
-            <a:spAutoFit/>
-          </a:bodyPr>
-          <a:lstStyle/>
-          <a:p>
-            <a:pPr algn="ctr">
-              <a:lnSpc>
-                <a:spcPct val="108000"/>
-              </a:lnSpc>
-            </a:pPr>
-            <a:r>
-              <a:rPr sz="1250" b="0" i="0">
-                <a:solidFill>
-                  <a:srgbClr val="065F46"/>
-                </a:solidFill>
-                <a:latin typeface="Segoe UI"/>
-              </a:rPr>
-              <a:t>NER</a:t>
-            </a:r>
-          </a:p>
-        </p:txBody>
-      </p:sp>
-      <p:sp>
-        <p:nvSpPr>
-          <p:cNvPr id="52" name="Rounded Rectangle 51"/>
-          <p:cNvSpPr/>
-          <p:nvPr/>
-        </p:nvSpPr>
-        <p:spPr>
-          <a:xfrm>
-            <a:off x="3511299" y="4855464"/>
-            <a:ext cx="562356" cy="420624"/>
-          </a:xfrm>
-          <a:prstGeom prst="roundRect">
-            <a:avLst>
-              <a:gd name="adj" fmla="val 6000"/>
-            </a:avLst>
-          </a:prstGeom>
-          <a:solidFill>
-            <a:srgbClr val="ECFDF5"/>
-          </a:solidFill>
-          <a:ln>
-            <a:noFill/>
-          </a:ln>
-          <a:effectLst/>
-        </p:spPr>
-        <p:style>
-          <a:lnRef idx="1">
-            <a:schemeClr val="accent1"/>
-          </a:lnRef>
-          <a:fillRef idx="3">
-            <a:schemeClr val="accent1"/>
-          </a:fillRef>
-          <a:effectRef idx="2">
-            <a:schemeClr val="accent1"/>
-          </a:effectRef>
-          <a:fontRef idx="minor">
-            <a:schemeClr val="lt1"/>
-          </a:fontRef>
-        </p:style>
-        <p:txBody>
-          <a:bodyPr rtlCol="0" anchor="ctr"/>
-          <a:lstStyle/>
-          <a:p>
-            <a:pPr algn="ctr"/>
-          </a:p>
-        </p:txBody>
-      </p:sp>
-      <p:sp>
-        <p:nvSpPr>
-          <p:cNvPr id="53" name="TextBox 52"/>
-          <p:cNvSpPr txBox="1"/>
-          <p:nvPr/>
-        </p:nvSpPr>
-        <p:spPr>
-          <a:xfrm>
-            <a:off x="3511299" y="4855464"/>
-            <a:ext cx="562356" cy="420624"/>
-          </a:xfrm>
-          <a:prstGeom prst="rect">
-            <a:avLst/>
-          </a:prstGeom>
-          <a:noFill/>
-        </p:spPr>
-        <p:txBody>
-          <a:bodyPr wrap="square" anchor="ctr" lIns="0" rIns="0" tIns="0" bIns="0">
-            <a:spAutoFit/>
-          </a:bodyPr>
-          <a:lstStyle/>
-          <a:p>
-            <a:pPr algn="ctr">
-              <a:lnSpc>
-                <a:spcPct val="108000"/>
-              </a:lnSpc>
-            </a:pPr>
-            <a:r>
-              <a:rPr sz="1250" b="0" i="0">
-                <a:solidFill>
-                  <a:srgbClr val="065F46"/>
-                </a:solidFill>
-                <a:latin typeface="Segoe UI"/>
-              </a:rPr>
-              <a:t>STT</a:t>
-            </a:r>
-          </a:p>
-        </p:txBody>
-      </p:sp>
-      <p:sp>
-        <p:nvSpPr>
-          <p:cNvPr id="54" name="Rounded Rectangle 53"/>
-          <p:cNvSpPr/>
-          <p:nvPr/>
-        </p:nvSpPr>
-        <p:spPr>
-          <a:xfrm>
-            <a:off x="4201671" y="4855464"/>
-            <a:ext cx="1042415" cy="420624"/>
-          </a:xfrm>
-          <a:prstGeom prst="roundRect">
-            <a:avLst>
-              <a:gd name="adj" fmla="val 6000"/>
-            </a:avLst>
-          </a:prstGeom>
-          <a:solidFill>
-            <a:srgbClr val="ECFDF5"/>
-          </a:solidFill>
-          <a:ln>
-            <a:noFill/>
-          </a:ln>
-          <a:effectLst/>
-        </p:spPr>
-        <p:style>
-          <a:lnRef idx="1">
-            <a:schemeClr val="accent1"/>
-          </a:lnRef>
-          <a:fillRef idx="3">
-            <a:schemeClr val="accent1"/>
-          </a:fillRef>
-          <a:effectRef idx="2">
-            <a:schemeClr val="accent1"/>
-          </a:effectRef>
-          <a:fontRef idx="minor">
-            <a:schemeClr val="lt1"/>
-          </a:fontRef>
-        </p:style>
-        <p:txBody>
-          <a:bodyPr rtlCol="0" anchor="ctr"/>
-          <a:lstStyle/>
-          <a:p>
-            <a:pPr algn="ctr"/>
-          </a:p>
-        </p:txBody>
-      </p:sp>
-      <p:sp>
-        <p:nvSpPr>
-          <p:cNvPr id="55" name="TextBox 54"/>
-          <p:cNvSpPr txBox="1"/>
-          <p:nvPr/>
-        </p:nvSpPr>
-        <p:spPr>
-          <a:xfrm>
-            <a:off x="4201671" y="4855464"/>
-            <a:ext cx="1042415" cy="420624"/>
-          </a:xfrm>
-          <a:prstGeom prst="rect">
-            <a:avLst/>
-          </a:prstGeom>
-          <a:noFill/>
-        </p:spPr>
-        <p:txBody>
-          <a:bodyPr wrap="square" anchor="ctr" lIns="0" rIns="0" tIns="0" bIns="0">
-            <a:spAutoFit/>
-          </a:bodyPr>
-          <a:lstStyle/>
-          <a:p>
-            <a:pPr algn="ctr">
-              <a:lnSpc>
-                <a:spcPct val="108000"/>
-              </a:lnSpc>
-            </a:pPr>
-            <a:r>
-              <a:rPr sz="1250" b="0" i="0">
-                <a:solidFill>
-                  <a:srgbClr val="065F46"/>
-                </a:solidFill>
-                <a:latin typeface="Segoe UI"/>
-              </a:rPr>
-              <a:t>Simplify</a:t>
-            </a:r>
-          </a:p>
-        </p:txBody>
-      </p:sp>
-      <p:sp>
-        <p:nvSpPr>
-          <p:cNvPr id="56" name="Down Arrow 55"/>
-          <p:cNvSpPr/>
-          <p:nvPr/>
-        </p:nvSpPr>
-        <p:spPr>
-          <a:xfrm>
-            <a:off x="1627632" y="5458968"/>
-            <a:ext cx="274320" cy="155448"/>
+            <a:off x="1627632" y="5175504"/>
+            <a:ext cx="274320" cy="164592"/>
           </a:xfrm>
           <a:prstGeom prst="downArrow">
             <a:avLst/>
@@ -9725,14 +8175,14 @@
       </p:sp>
       <p:sp>
         <p:nvSpPr>
-          <p:cNvPr id="57" name="Rounded Rectangle 56"/>
+          <p:cNvPr id="29" name="Rounded Rectangle 28"/>
           <p:cNvSpPr/>
           <p:nvPr/>
         </p:nvSpPr>
         <p:spPr>
           <a:xfrm>
-            <a:off x="548640" y="5586984"/>
-            <a:ext cx="2331720" cy="841248"/>
+            <a:off x="548640" y="5312664"/>
+            <a:ext cx="2331720" cy="786384"/>
           </a:xfrm>
           <a:prstGeom prst="roundRect">
             <a:avLst>
@@ -9773,14 +8223,14 @@
       </p:sp>
       <p:sp>
         <p:nvSpPr>
-          <p:cNvPr id="58" name="TextBox 57"/>
-          <p:cNvSpPr txBox="1"/>
-          <p:nvPr/>
-        </p:nvSpPr>
-        <p:spPr>
-          <a:xfrm>
-            <a:off x="713232" y="5678424"/>
-            <a:ext cx="2011680" cy="320040"/>
+          <p:cNvPr id="30" name="TextBox 29"/>
+          <p:cNvSpPr txBox="1"/>
+          <p:nvPr/>
+        </p:nvSpPr>
+        <p:spPr>
+          <a:xfrm>
+            <a:off x="713232" y="5385816"/>
+            <a:ext cx="2011680" cy="292608"/>
           </a:xfrm>
           <a:prstGeom prst="rect">
             <a:avLst/>
@@ -9812,13 +8262,13 @@
       </p:sp>
       <p:sp>
         <p:nvSpPr>
-          <p:cNvPr id="59" name="TextBox 58"/>
-          <p:cNvSpPr txBox="1"/>
-          <p:nvPr/>
-        </p:nvSpPr>
-        <p:spPr>
-          <a:xfrm>
-            <a:off x="713232" y="5916168"/>
+          <p:cNvPr id="31" name="TextBox 30"/>
+          <p:cNvSpPr txBox="1"/>
+          <p:nvPr/>
+        </p:nvSpPr>
+        <p:spPr>
+          <a:xfrm>
+            <a:off x="713232" y="5605272"/>
             <a:ext cx="2011680" cy="457200"/>
           </a:xfrm>
           <a:prstGeom prst="rect">
@@ -9851,14 +8301,14 @@
       </p:sp>
       <p:sp>
         <p:nvSpPr>
-          <p:cNvPr id="60" name="Rounded Rectangle 59"/>
+          <p:cNvPr id="32" name="Rounded Rectangle 31"/>
           <p:cNvSpPr/>
           <p:nvPr/>
         </p:nvSpPr>
         <p:spPr>
           <a:xfrm>
-            <a:off x="3063240" y="5586984"/>
-            <a:ext cx="8577072" cy="841248"/>
+            <a:off x="3063240" y="5312664"/>
+            <a:ext cx="8577072" cy="786384"/>
           </a:xfrm>
           <a:prstGeom prst="roundRect">
             <a:avLst>
@@ -9899,60 +8349,14 @@
       </p:sp>
       <p:sp>
         <p:nvSpPr>
-          <p:cNvPr id="61" name="Rounded Rectangle 60"/>
-          <p:cNvSpPr/>
-          <p:nvPr/>
-        </p:nvSpPr>
-        <p:spPr>
-          <a:xfrm>
-            <a:off x="3" y="5806440"/>
-            <a:ext cx="2290572" cy="420624"/>
-          </a:xfrm>
-          <a:prstGeom prst="roundRect">
-            <a:avLst>
-              <a:gd name="adj" fmla="val 6000"/>
-            </a:avLst>
-          </a:prstGeom>
-          <a:solidFill>
-            <a:srgbClr val="FEF2F2"/>
-          </a:solidFill>
-          <a:ln>
-            <a:noFill/>
-          </a:ln>
-          <a:effectLst/>
-        </p:spPr>
-        <p:style>
-          <a:lnRef idx="1">
-            <a:schemeClr val="accent1"/>
-          </a:lnRef>
-          <a:fillRef idx="3">
-            <a:schemeClr val="accent1"/>
-          </a:fillRef>
-          <a:effectRef idx="2">
-            <a:schemeClr val="accent1"/>
-          </a:effectRef>
-          <a:fontRef idx="minor">
-            <a:schemeClr val="lt1"/>
-          </a:fontRef>
-        </p:style>
-        <p:txBody>
-          <a:bodyPr rtlCol="0" anchor="ctr"/>
-          <a:lstStyle/>
-          <a:p>
-            <a:pPr algn="ctr"/>
-          </a:p>
-        </p:txBody>
-      </p:sp>
-      <p:sp>
-        <p:nvSpPr>
-          <p:cNvPr id="62" name="TextBox 61"/>
-          <p:cNvSpPr txBox="1"/>
-          <p:nvPr/>
-        </p:nvSpPr>
-        <p:spPr>
-          <a:xfrm>
-            <a:off x="3" y="5806440"/>
-            <a:ext cx="2290572" cy="420624"/>
+          <p:cNvPr id="33" name="TextBox 32"/>
+          <p:cNvSpPr txBox="1"/>
+          <p:nvPr/>
+        </p:nvSpPr>
+        <p:spPr>
+          <a:xfrm>
+            <a:off x="3337560" y="5312664"/>
+            <a:ext cx="8028432" cy="786384"/>
           </a:xfrm>
           <a:prstGeom prst="rect">
             <a:avLst/>
@@ -9965,221 +8369,51 @@
           </a:bodyPr>
           <a:lstStyle/>
           <a:p>
-            <a:pPr algn="ctr">
+            <a:pPr algn="l">
+              <a:lnSpc>
+                <a:spcPct val="115000"/>
+              </a:lnSpc>
+            </a:pPr>
+            <a:r>
+              <a:rPr sz="1400" b="0" i="0">
+                <a:solidFill>
+                  <a:srgbClr val="7F1D1D"/>
+                </a:solidFill>
+                <a:latin typeface="Segoe UI"/>
+              </a:rPr>
+              <a:t>LoRA adapter (4.5 MB)  ·  485-word dictionary  ·  feedback.csv</a:t>
+            </a:r>
+          </a:p>
+        </p:txBody>
+      </p:sp>
+      <p:sp>
+        <p:nvSpPr>
+          <p:cNvPr id="34" name="TextBox 33"/>
+          <p:cNvSpPr txBox="1"/>
+          <p:nvPr/>
+        </p:nvSpPr>
+        <p:spPr>
+          <a:xfrm>
+            <a:off x="548640" y="6382512"/>
+            <a:ext cx="10972800" cy="320040"/>
+          </a:xfrm>
+          <a:prstGeom prst="rect">
+            <a:avLst/>
+          </a:prstGeom>
+          <a:noFill/>
+        </p:spPr>
+        <p:txBody>
+          <a:bodyPr wrap="square" anchor="t" lIns="0" rIns="0" tIns="0" bIns="0">
+            <a:spAutoFit/>
+          </a:bodyPr>
+          <a:lstStyle/>
+          <a:p>
+            <a:pPr algn="l">
               <a:lnSpc>
                 <a:spcPct val="108000"/>
               </a:lnSpc>
             </a:pPr>
             <a:r>
-              <a:rPr sz="1250" b="0" i="0">
-                <a:solidFill>
-                  <a:srgbClr val="7F1D1D"/>
-                </a:solidFill>
-                <a:latin typeface="Segoe UI"/>
-              </a:rPr>
-              <a:t>LoRA adapter (4.5 MB)</a:t>
-            </a:r>
-          </a:p>
-        </p:txBody>
-      </p:sp>
-      <p:sp>
-        <p:nvSpPr>
-          <p:cNvPr id="63" name="Rounded Rectangle 62"/>
-          <p:cNvSpPr/>
-          <p:nvPr/>
-        </p:nvSpPr>
-        <p:spPr>
-          <a:xfrm>
-            <a:off x="2418591" y="5806440"/>
-            <a:ext cx="2098548" cy="420624"/>
-          </a:xfrm>
-          <a:prstGeom prst="roundRect">
-            <a:avLst>
-              <a:gd name="adj" fmla="val 6000"/>
-            </a:avLst>
-          </a:prstGeom>
-          <a:solidFill>
-            <a:srgbClr val="FEF2F2"/>
-          </a:solidFill>
-          <a:ln>
-            <a:noFill/>
-          </a:ln>
-          <a:effectLst/>
-        </p:spPr>
-        <p:style>
-          <a:lnRef idx="1">
-            <a:schemeClr val="accent1"/>
-          </a:lnRef>
-          <a:fillRef idx="3">
-            <a:schemeClr val="accent1"/>
-          </a:fillRef>
-          <a:effectRef idx="2">
-            <a:schemeClr val="accent1"/>
-          </a:effectRef>
-          <a:fontRef idx="minor">
-            <a:schemeClr val="lt1"/>
-          </a:fontRef>
-        </p:style>
-        <p:txBody>
-          <a:bodyPr rtlCol="0" anchor="ctr"/>
-          <a:lstStyle/>
-          <a:p>
-            <a:pPr algn="ctr"/>
-          </a:p>
-        </p:txBody>
-      </p:sp>
-      <p:sp>
-        <p:nvSpPr>
-          <p:cNvPr id="64" name="TextBox 63"/>
-          <p:cNvSpPr txBox="1"/>
-          <p:nvPr/>
-        </p:nvSpPr>
-        <p:spPr>
-          <a:xfrm>
-            <a:off x="2418591" y="5806440"/>
-            <a:ext cx="2098548" cy="420624"/>
-          </a:xfrm>
-          <a:prstGeom prst="rect">
-            <a:avLst/>
-          </a:prstGeom>
-          <a:noFill/>
-        </p:spPr>
-        <p:txBody>
-          <a:bodyPr wrap="square" anchor="ctr" lIns="0" rIns="0" tIns="0" bIns="0">
-            <a:spAutoFit/>
-          </a:bodyPr>
-          <a:lstStyle/>
-          <a:p>
-            <a:pPr algn="ctr">
-              <a:lnSpc>
-                <a:spcPct val="108000"/>
-              </a:lnSpc>
-            </a:pPr>
-            <a:r>
-              <a:rPr sz="1250" b="0" i="0">
-                <a:solidFill>
-                  <a:srgbClr val="7F1D1D"/>
-                </a:solidFill>
-                <a:latin typeface="Segoe UI"/>
-              </a:rPr>
-              <a:t>485-word dictionary</a:t>
-            </a:r>
-          </a:p>
-        </p:txBody>
-      </p:sp>
-      <p:sp>
-        <p:nvSpPr>
-          <p:cNvPr id="65" name="Rounded Rectangle 64"/>
-          <p:cNvSpPr/>
-          <p:nvPr/>
-        </p:nvSpPr>
-        <p:spPr>
-          <a:xfrm>
-            <a:off x="4645155" y="5806440"/>
-            <a:ext cx="1426464" cy="420624"/>
-          </a:xfrm>
-          <a:prstGeom prst="roundRect">
-            <a:avLst>
-              <a:gd name="adj" fmla="val 6000"/>
-            </a:avLst>
-          </a:prstGeom>
-          <a:solidFill>
-            <a:srgbClr val="FEF2F2"/>
-          </a:solidFill>
-          <a:ln>
-            <a:noFill/>
-          </a:ln>
-          <a:effectLst/>
-        </p:spPr>
-        <p:style>
-          <a:lnRef idx="1">
-            <a:schemeClr val="accent1"/>
-          </a:lnRef>
-          <a:fillRef idx="3">
-            <a:schemeClr val="accent1"/>
-          </a:fillRef>
-          <a:effectRef idx="2">
-            <a:schemeClr val="accent1"/>
-          </a:effectRef>
-          <a:fontRef idx="minor">
-            <a:schemeClr val="lt1"/>
-          </a:fontRef>
-        </p:style>
-        <p:txBody>
-          <a:bodyPr rtlCol="0" anchor="ctr"/>
-          <a:lstStyle/>
-          <a:p>
-            <a:pPr algn="ctr"/>
-          </a:p>
-        </p:txBody>
-      </p:sp>
-      <p:sp>
-        <p:nvSpPr>
-          <p:cNvPr id="66" name="TextBox 65"/>
-          <p:cNvSpPr txBox="1"/>
-          <p:nvPr/>
-        </p:nvSpPr>
-        <p:spPr>
-          <a:xfrm>
-            <a:off x="4645155" y="5806440"/>
-            <a:ext cx="1426464" cy="420624"/>
-          </a:xfrm>
-          <a:prstGeom prst="rect">
-            <a:avLst/>
-          </a:prstGeom>
-          <a:noFill/>
-        </p:spPr>
-        <p:txBody>
-          <a:bodyPr wrap="square" anchor="ctr" lIns="0" rIns="0" tIns="0" bIns="0">
-            <a:spAutoFit/>
-          </a:bodyPr>
-          <a:lstStyle/>
-          <a:p>
-            <a:pPr algn="ctr">
-              <a:lnSpc>
-                <a:spcPct val="108000"/>
-              </a:lnSpc>
-            </a:pPr>
-            <a:r>
-              <a:rPr sz="1250" b="0" i="0">
-                <a:solidFill>
-                  <a:srgbClr val="7F1D1D"/>
-                </a:solidFill>
-                <a:latin typeface="Segoe UI"/>
-              </a:rPr>
-              <a:t>feedback.csv</a:t>
-            </a:r>
-          </a:p>
-        </p:txBody>
-      </p:sp>
-      <p:sp>
-        <p:nvSpPr>
-          <p:cNvPr id="67" name="TextBox 66"/>
-          <p:cNvSpPr txBox="1"/>
-          <p:nvPr/>
-        </p:nvSpPr>
-        <p:spPr>
-          <a:xfrm>
-            <a:off x="548640" y="6263640"/>
-            <a:ext cx="10972800" cy="320040"/>
-          </a:xfrm>
-          <a:prstGeom prst="rect">
-            <a:avLst/>
-          </a:prstGeom>
-          <a:noFill/>
-        </p:spPr>
-        <p:txBody>
-          <a:bodyPr wrap="square" anchor="t" lIns="0" rIns="0" tIns="0" bIns="0">
-            <a:spAutoFit/>
-          </a:bodyPr>
-          <a:lstStyle/>
-          <a:p>
-            <a:pPr algn="l">
-              <a:lnSpc>
-                <a:spcPct val="108000"/>
-              </a:lnSpc>
-            </a:pPr>
-            <a:r>
               <a:rPr sz="1300" b="0" i="1">
                 <a:solidFill>
                   <a:srgbClr val="6B7280"/>
@@ -10187,84 +8421,6 @@
                 <a:latin typeface="Segoe UI"/>
               </a:rPr>
               <a:t>Self-hosted: Docker → Hugging Face Spaces, or Colab T4 GPU with a public share link.</a:t>
-            </a:r>
-          </a:p>
-        </p:txBody>
-      </p:sp>
-      <p:sp>
-        <p:nvSpPr>
-          <p:cNvPr id="68" name="TextBox 67"/>
-          <p:cNvSpPr txBox="1"/>
-          <p:nvPr/>
-        </p:nvSpPr>
-        <p:spPr>
-          <a:xfrm>
-            <a:off x="548640" y="6528816"/>
-            <a:ext cx="5486400" cy="274320"/>
-          </a:xfrm>
-          <a:prstGeom prst="rect">
-            <a:avLst/>
-          </a:prstGeom>
-          <a:noFill/>
-        </p:spPr>
-        <p:txBody>
-          <a:bodyPr wrap="square" anchor="t" lIns="0" rIns="0" tIns="0" bIns="0">
-            <a:spAutoFit/>
-          </a:bodyPr>
-          <a:lstStyle/>
-          <a:p>
-            <a:pPr algn="l">
-              <a:lnSpc>
-                <a:spcPct val="108000"/>
-              </a:lnSpc>
-            </a:pPr>
-            <a:r>
-              <a:rPr sz="1100" b="0" i="0">
-                <a:solidFill>
-                  <a:srgbClr val="6B7280"/>
-                </a:solidFill>
-                <a:latin typeface="Segoe UI"/>
-              </a:rPr>
-              <a:t>UrduStack</a:t>
-            </a:r>
-          </a:p>
-        </p:txBody>
-      </p:sp>
-      <p:sp>
-        <p:nvSpPr>
-          <p:cNvPr id="69" name="TextBox 68"/>
-          <p:cNvSpPr txBox="1"/>
-          <p:nvPr/>
-        </p:nvSpPr>
-        <p:spPr>
-          <a:xfrm>
-            <a:off x="10881360" y="6528816"/>
-            <a:ext cx="822960" cy="274320"/>
-          </a:xfrm>
-          <a:prstGeom prst="rect">
-            <a:avLst/>
-          </a:prstGeom>
-          <a:noFill/>
-        </p:spPr>
-        <p:txBody>
-          <a:bodyPr wrap="square" anchor="t" lIns="0" rIns="0" tIns="0" bIns="0">
-            <a:spAutoFit/>
-          </a:bodyPr>
-          <a:lstStyle/>
-          <a:p>
-            <a:pPr algn="r">
-              <a:lnSpc>
-                <a:spcPct val="108000"/>
-              </a:lnSpc>
-            </a:pPr>
-            <a:r>
-              <a:rPr sz="1100" b="0" i="0">
-                <a:solidFill>
-                  <a:srgbClr val="6B7280"/>
-                </a:solidFill>
-                <a:latin typeface="Segoe UI"/>
-              </a:rPr>
-              <a:t>5</a:t>
             </a:r>
           </a:p>
         </p:txBody>
@@ -11799,7 +9955,7 @@
         <p:spPr>
           <a:xfrm>
             <a:off x="548640" y="4709160"/>
-            <a:ext cx="11091672" cy="1417320"/>
+            <a:ext cx="11091672" cy="1645920"/>
           </a:xfrm>
           <a:prstGeom prst="roundRect">
             <a:avLst>
@@ -11885,8 +10041,8 @@
         </p:nvSpPr>
         <p:spPr>
           <a:xfrm>
-            <a:off x="777240" y="5193792"/>
-            <a:ext cx="10607040" cy="411480"/>
+            <a:off x="777240" y="5166360"/>
+            <a:ext cx="10607040" cy="685800"/>
           </a:xfrm>
           <a:prstGeom prst="rect">
             <a:avLst/>
@@ -11901,49 +10057,65 @@
           <a:p>
             <a:pPr algn="l">
               <a:lnSpc>
+                <a:spcPct val="125000"/>
+              </a:lnSpc>
+            </a:pPr>
+            <a:r>
+              <a:rPr sz="1600" b="0" i="0">
+                <a:solidFill>
+                  <a:srgbClr val="0F766E"/>
+                </a:solidFill>
+                <a:latin typeface="Consolas"/>
+              </a:rPr>
+              <a:t>"job available 50000 per week send processing fee"</a:t>
+            </a:r>
+          </a:p>
+          <a:p>
+            <a:pPr algn="l">
+              <a:lnSpc>
+                <a:spcPct val="125000"/>
+              </a:lnSpc>
+            </a:pPr>
+            <a:r>
+              <a:rPr sz="1600" b="0" i="0">
+                <a:solidFill>
+                  <a:srgbClr val="0F766E"/>
+                </a:solidFill>
+                <a:latin typeface="Consolas"/>
+              </a:rPr>
+              <a:t>→  score 1.00, HIGH, "Fake Job Posting"</a:t>
+            </a:r>
+          </a:p>
+        </p:txBody>
+      </p:sp>
+      <p:sp>
+        <p:nvSpPr>
+          <p:cNvPr id="37" name="TextBox 36"/>
+          <p:cNvSpPr txBox="1"/>
+          <p:nvPr/>
+        </p:nvSpPr>
+        <p:spPr>
+          <a:xfrm>
+            <a:off x="777240" y="6053328"/>
+            <a:ext cx="10607040" cy="365760"/>
+          </a:xfrm>
+          <a:prstGeom prst="rect">
+            <a:avLst/>
+          </a:prstGeom>
+          <a:noFill/>
+        </p:spPr>
+        <p:txBody>
+          <a:bodyPr wrap="square" anchor="t" lIns="0" rIns="0" tIns="0" bIns="0">
+            <a:spAutoFit/>
+          </a:bodyPr>
+          <a:lstStyle/>
+          <a:p>
+            <a:pPr algn="l">
+              <a:lnSpc>
                 <a:spcPct val="108000"/>
               </a:lnSpc>
             </a:pPr>
             <a:r>
-              <a:rPr sz="1700" b="0" i="0">
-                <a:solidFill>
-                  <a:srgbClr val="0F766E"/>
-                </a:solidFill>
-                <a:latin typeface="Consolas"/>
-              </a:rPr>
-              <a:t>"job available 50000 per week send processing fee"  →  score 1.00, HIGH, "Fake Job Posting"</a:t>
-            </a:r>
-          </a:p>
-        </p:txBody>
-      </p:sp>
-      <p:sp>
-        <p:nvSpPr>
-          <p:cNvPr id="37" name="TextBox 36"/>
-          <p:cNvSpPr txBox="1"/>
-          <p:nvPr/>
-        </p:nvSpPr>
-        <p:spPr>
-          <a:xfrm>
-            <a:off x="777240" y="5623560"/>
-            <a:ext cx="10607040" cy="365760"/>
-          </a:xfrm>
-          <a:prstGeom prst="rect">
-            <a:avLst/>
-          </a:prstGeom>
-          <a:noFill/>
-        </p:spPr>
-        <p:txBody>
-          <a:bodyPr wrap="square" anchor="t" lIns="0" rIns="0" tIns="0" bIns="0">
-            <a:spAutoFit/>
-          </a:bodyPr>
-          <a:lstStyle/>
-          <a:p>
-            <a:pPr algn="l">
-              <a:lnSpc>
-                <a:spcPct val="108000"/>
-              </a:lnSpc>
-            </a:pPr>
-            <a:r>
               <a:rPr sz="1300" b="0" i="1">
                 <a:solidFill>
                   <a:srgbClr val="6B7280"/>
@@ -11951,84 +10123,6 @@
                 <a:latin typeface="Segoe UI"/>
               </a:rPr>
               <a:t>Every stage runs in-process — no external API calls, sub-second response.</a:t>
-            </a:r>
-          </a:p>
-        </p:txBody>
-      </p:sp>
-      <p:sp>
-        <p:nvSpPr>
-          <p:cNvPr id="38" name="TextBox 37"/>
-          <p:cNvSpPr txBox="1"/>
-          <p:nvPr/>
-        </p:nvSpPr>
-        <p:spPr>
-          <a:xfrm>
-            <a:off x="548640" y="6528816"/>
-            <a:ext cx="5486400" cy="274320"/>
-          </a:xfrm>
-          <a:prstGeom prst="rect">
-            <a:avLst/>
-          </a:prstGeom>
-          <a:noFill/>
-        </p:spPr>
-        <p:txBody>
-          <a:bodyPr wrap="square" anchor="t" lIns="0" rIns="0" tIns="0" bIns="0">
-            <a:spAutoFit/>
-          </a:bodyPr>
-          <a:lstStyle/>
-          <a:p>
-            <a:pPr algn="l">
-              <a:lnSpc>
-                <a:spcPct val="108000"/>
-              </a:lnSpc>
-            </a:pPr>
-            <a:r>
-              <a:rPr sz="1100" b="0" i="0">
-                <a:solidFill>
-                  <a:srgbClr val="6B7280"/>
-                </a:solidFill>
-                <a:latin typeface="Segoe UI"/>
-              </a:rPr>
-              <a:t>UrduStack</a:t>
-            </a:r>
-          </a:p>
-        </p:txBody>
-      </p:sp>
-      <p:sp>
-        <p:nvSpPr>
-          <p:cNvPr id="39" name="TextBox 38"/>
-          <p:cNvSpPr txBox="1"/>
-          <p:nvPr/>
-        </p:nvSpPr>
-        <p:spPr>
-          <a:xfrm>
-            <a:off x="10881360" y="6528816"/>
-            <a:ext cx="822960" cy="274320"/>
-          </a:xfrm>
-          <a:prstGeom prst="rect">
-            <a:avLst/>
-          </a:prstGeom>
-          <a:noFill/>
-        </p:spPr>
-        <p:txBody>
-          <a:bodyPr wrap="square" anchor="t" lIns="0" rIns="0" tIns="0" bIns="0">
-            <a:spAutoFit/>
-          </a:bodyPr>
-          <a:lstStyle/>
-          <a:p>
-            <a:pPr algn="r">
-              <a:lnSpc>
-                <a:spcPct val="108000"/>
-              </a:lnSpc>
-            </a:pPr>
-            <a:r>
-              <a:rPr sz="1100" b="0" i="0">
-                <a:solidFill>
-                  <a:srgbClr val="6B7280"/>
-                </a:solidFill>
-                <a:latin typeface="Segoe UI"/>
-              </a:rPr>
-              <a:t>6</a:t>
             </a:r>
           </a:p>
         </p:txBody>
@@ -12968,84 +11062,6 @@
           </a:p>
         </p:txBody>
       </p:sp>
-      <p:sp>
-        <p:nvSpPr>
-          <p:cNvPr id="25" name="TextBox 24"/>
-          <p:cNvSpPr txBox="1"/>
-          <p:nvPr/>
-        </p:nvSpPr>
-        <p:spPr>
-          <a:xfrm>
-            <a:off x="548640" y="6528816"/>
-            <a:ext cx="5486400" cy="274320"/>
-          </a:xfrm>
-          <a:prstGeom prst="rect">
-            <a:avLst/>
-          </a:prstGeom>
-          <a:noFill/>
-        </p:spPr>
-        <p:txBody>
-          <a:bodyPr wrap="square" anchor="t" lIns="0" rIns="0" tIns="0" bIns="0">
-            <a:spAutoFit/>
-          </a:bodyPr>
-          <a:lstStyle/>
-          <a:p>
-            <a:pPr algn="l">
-              <a:lnSpc>
-                <a:spcPct val="108000"/>
-              </a:lnSpc>
-            </a:pPr>
-            <a:r>
-              <a:rPr sz="1100" b="0" i="0">
-                <a:solidFill>
-                  <a:srgbClr val="6B7280"/>
-                </a:solidFill>
-                <a:latin typeface="Segoe UI"/>
-              </a:rPr>
-              <a:t>UrduStack</a:t>
-            </a:r>
-          </a:p>
-        </p:txBody>
-      </p:sp>
-      <p:sp>
-        <p:nvSpPr>
-          <p:cNvPr id="26" name="TextBox 25"/>
-          <p:cNvSpPr txBox="1"/>
-          <p:nvPr/>
-        </p:nvSpPr>
-        <p:spPr>
-          <a:xfrm>
-            <a:off x="10881360" y="6528816"/>
-            <a:ext cx="822960" cy="274320"/>
-          </a:xfrm>
-          <a:prstGeom prst="rect">
-            <a:avLst/>
-          </a:prstGeom>
-          <a:noFill/>
-        </p:spPr>
-        <p:txBody>
-          <a:bodyPr wrap="square" anchor="t" lIns="0" rIns="0" tIns="0" bIns="0">
-            <a:spAutoFit/>
-          </a:bodyPr>
-          <a:lstStyle/>
-          <a:p>
-            <a:pPr algn="r">
-              <a:lnSpc>
-                <a:spcPct val="108000"/>
-              </a:lnSpc>
-            </a:pPr>
-            <a:r>
-              <a:rPr sz="1100" b="0" i="0">
-                <a:solidFill>
-                  <a:srgbClr val="6B7280"/>
-                </a:solidFill>
-                <a:latin typeface="Segoe UI"/>
-              </a:rPr>
-              <a:t>7</a:t>
-            </a:r>
-          </a:p>
-        </p:txBody>
-      </p:sp>
     </p:spTree>
   </p:cSld>
   <p:clrMapOvr>
@@ -13196,7 +11212,7 @@
       </p:sp>
       <p:pic>
         <p:nvPicPr>
-          <p:cNvPr id="5" name="Picture 4" descr="04_gradio_result.png"/>
+          <p:cNvPr id="5" name="Picture 4" descr="04_gradio_result_slide_crop.png"/>
           <p:cNvPicPr>
             <a:picLocks noChangeAspect="1"/>
           </p:cNvPicPr>
@@ -13210,8 +11226,8 @@
         </p:blipFill>
         <p:spPr>
           <a:xfrm>
-            <a:off x="2294972" y="1783080"/>
-            <a:ext cx="3365334" cy="4617720"/>
+            <a:off x="502920" y="2044337"/>
+            <a:ext cx="6949440" cy="4095205"/>
           </a:xfrm>
           <a:prstGeom prst="rect">
             <a:avLst/>
@@ -13455,84 +11471,6 @@
                 <a:latin typeface="Segoe UI"/>
               </a:rPr>
               <a:t>•  Optional feedback loop feeds future retraining</a:t>
-            </a:r>
-          </a:p>
-        </p:txBody>
-      </p:sp>
-      <p:sp>
-        <p:nvSpPr>
-          <p:cNvPr id="9" name="TextBox 8"/>
-          <p:cNvSpPr txBox="1"/>
-          <p:nvPr/>
-        </p:nvSpPr>
-        <p:spPr>
-          <a:xfrm>
-            <a:off x="548640" y="6528816"/>
-            <a:ext cx="5486400" cy="274320"/>
-          </a:xfrm>
-          <a:prstGeom prst="rect">
-            <a:avLst/>
-          </a:prstGeom>
-          <a:noFill/>
-        </p:spPr>
-        <p:txBody>
-          <a:bodyPr wrap="square" anchor="t" lIns="0" rIns="0" tIns="0" bIns="0">
-            <a:spAutoFit/>
-          </a:bodyPr>
-          <a:lstStyle/>
-          <a:p>
-            <a:pPr algn="l">
-              <a:lnSpc>
-                <a:spcPct val="108000"/>
-              </a:lnSpc>
-            </a:pPr>
-            <a:r>
-              <a:rPr sz="1100" b="0" i="0">
-                <a:solidFill>
-                  <a:srgbClr val="6B7280"/>
-                </a:solidFill>
-                <a:latin typeface="Segoe UI"/>
-              </a:rPr>
-              <a:t>UrduStack</a:t>
-            </a:r>
-          </a:p>
-        </p:txBody>
-      </p:sp>
-      <p:sp>
-        <p:nvSpPr>
-          <p:cNvPr id="10" name="TextBox 9"/>
-          <p:cNvSpPr txBox="1"/>
-          <p:nvPr/>
-        </p:nvSpPr>
-        <p:spPr>
-          <a:xfrm>
-            <a:off x="10881360" y="6528816"/>
-            <a:ext cx="822960" cy="274320"/>
-          </a:xfrm>
-          <a:prstGeom prst="rect">
-            <a:avLst/>
-          </a:prstGeom>
-          <a:noFill/>
-        </p:spPr>
-        <p:txBody>
-          <a:bodyPr wrap="square" anchor="t" lIns="0" rIns="0" tIns="0" bIns="0">
-            <a:spAutoFit/>
-          </a:bodyPr>
-          <a:lstStyle/>
-          <a:p>
-            <a:pPr algn="r">
-              <a:lnSpc>
-                <a:spcPct val="108000"/>
-              </a:lnSpc>
-            </a:pPr>
-            <a:r>
-              <a:rPr sz="1100" b="0" i="0">
-                <a:solidFill>
-                  <a:srgbClr val="6B7280"/>
-                </a:solidFill>
-                <a:latin typeface="Segoe UI"/>
-              </a:rPr>
-              <a:t>8</a:t>
             </a:r>
           </a:p>
         </p:txBody>
@@ -14030,84 +11968,6 @@
                 <a:latin typeface="Segoe UI"/>
               </a:rPr>
               <a:t>•  WhatsApp bot is the highest-leverage distribution channel — reaches victims, not just judges</a:t>
-            </a:r>
-          </a:p>
-        </p:txBody>
-      </p:sp>
-      <p:sp>
-        <p:nvSpPr>
-          <p:cNvPr id="9" name="TextBox 8"/>
-          <p:cNvSpPr txBox="1"/>
-          <p:nvPr/>
-        </p:nvSpPr>
-        <p:spPr>
-          <a:xfrm>
-            <a:off x="548640" y="6528816"/>
-            <a:ext cx="5486400" cy="274320"/>
-          </a:xfrm>
-          <a:prstGeom prst="rect">
-            <a:avLst/>
-          </a:prstGeom>
-          <a:noFill/>
-        </p:spPr>
-        <p:txBody>
-          <a:bodyPr wrap="square" anchor="t" lIns="0" rIns="0" tIns="0" bIns="0">
-            <a:spAutoFit/>
-          </a:bodyPr>
-          <a:lstStyle/>
-          <a:p>
-            <a:pPr algn="l">
-              <a:lnSpc>
-                <a:spcPct val="108000"/>
-              </a:lnSpc>
-            </a:pPr>
-            <a:r>
-              <a:rPr sz="1100" b="0" i="0">
-                <a:solidFill>
-                  <a:srgbClr val="6B7280"/>
-                </a:solidFill>
-                <a:latin typeface="Segoe UI"/>
-              </a:rPr>
-              <a:t>UrduStack</a:t>
-            </a:r>
-          </a:p>
-        </p:txBody>
-      </p:sp>
-      <p:sp>
-        <p:nvSpPr>
-          <p:cNvPr id="10" name="TextBox 9"/>
-          <p:cNvSpPr txBox="1"/>
-          <p:nvPr/>
-        </p:nvSpPr>
-        <p:spPr>
-          <a:xfrm>
-            <a:off x="10881360" y="6528816"/>
-            <a:ext cx="822960" cy="274320"/>
-          </a:xfrm>
-          <a:prstGeom prst="rect">
-            <a:avLst/>
-          </a:prstGeom>
-          <a:noFill/>
-        </p:spPr>
-        <p:txBody>
-          <a:bodyPr wrap="square" anchor="t" lIns="0" rIns="0" tIns="0" bIns="0">
-            <a:spAutoFit/>
-          </a:bodyPr>
-          <a:lstStyle/>
-          <a:p>
-            <a:pPr algn="r">
-              <a:lnSpc>
-                <a:spcPct val="108000"/>
-              </a:lnSpc>
-            </a:pPr>
-            <a:r>
-              <a:rPr sz="1100" b="0" i="0">
-                <a:solidFill>
-                  <a:srgbClr val="6B7280"/>
-                </a:solidFill>
-                <a:latin typeface="Segoe UI"/>
-              </a:rPr>
-              <a:t>9</a:t>
             </a:r>
           </a:p>
         </p:txBody>
